--- a/docs/po/presentations/LifeLinkKH-v2.pptx
+++ b/docs/po/presentations/LifeLinkKH-v2.pptx
@@ -18,6 +18,8 @@
     <p:sldId id="266" r:id="rId18"/>
     <p:sldId id="267" r:id="rId19"/>
     <p:sldId id="268" r:id="rId20"/>
+    <p:sldId id="269" r:id="rId21"/>
+    <p:sldId id="270" r:id="rId22"/>
   </p:sldIdLst>
   <p:sldSz cx="12191695" cy="6858000" type="screen4x3"/>
   <p:notesSz cx="6858000" cy="9144000"/>
@@ -600,75 +602,85 @@
           <a:lstStyle/>
           <a:p>
             <a:r>
-              <a:t>This slide replaces the Week-2 version of itself, which said "not yet built." Say that</a:t>
-            </a:r>
-          </a:p>
-          <a:p>
-            <a:r>
-              <a:t>change out loud if it's a returning audience — it's the actual headline.</a:t>
+              <a:t>This is the hand-off slide, not the demo itself. Say one sentence and switch devices:</a:t>
+            </a:r>
+          </a:p>
+          <a:p>
+            <a:r>
+              <a:t>"Rather than describe it, let me show it" — then tab away from the deck.</a:t>
             </a:r>
           </a:p>
           <a:p/>
           <a:p>
             <a:r>
-              <a:t>"Verified live" is a deliberate phrase, not filler: `flutter test`/`./mvnw verify` passing</a:t>
-            </a:r>
-          </a:p>
-          <a:p>
-            <a:r>
-              <a:t>is necessary but has been insufficient before on this project — a schema mismatch shipped</a:t>
-            </a:r>
-          </a:p>
-          <a:p>
-            <a:r>
-              <a:t>once behind a green build because the integration test that would have caught it silently</a:t>
-            </a:r>
-          </a:p>
-          <a:p>
-            <a:r>
-              <a:t>skips without Docker running. Every milestone since has been checked on an actual device or</a:t>
-            </a:r>
-          </a:p>
-          <a:p>
-            <a:r>
-              <a:t>browser, not just a green CI run.</a:t>
+              <a:t>Everything said out loud from here follows docs/po/demo-script.md, not this slide. That</a:t>
+            </a:r>
+          </a:p>
+          <a:p>
+            <a:r>
+              <a:t>file has the full narration, plus ready answers for the questions people actually ask</a:t>
+            </a:r>
+          </a:p>
+          <a:p>
+            <a:r>
+              <a:t>mid-demo (why a phone app and not a website, what happens if nobody accepts, why there's</a:t>
+            </a:r>
+          </a:p>
+          <a:p>
+            <a:r>
+              <a:t>no map). This slide exists so the deck doesn't go straight from "here's our scope" to "any</a:t>
+            </a:r>
+          </a:p>
+          <a:p>
+            <a:r>
+              <a:t>questions" with no visible proof in between.</a:t>
             </a:r>
           </a:p>
           <a:p/>
           <a:p>
             <a:r>
-              <a:t>M7's two remaining steps are both execution, not design: generate the upload keystore</a:t>
-            </a:r>
-          </a:p>
-          <a:p>
-            <a:r>
-              <a:t>(`docs/tech-lead/deploy-runbook.md`), then upload to Play Console's internal testing track.</a:t>
-            </a:r>
-          </a:p>
-          <a:p>
-            <a:r>
-              <a:t>Backend for the testing window is a tunneled laptop, not a hosted deploy — `DEC-007`,</a:t>
-            </a:r>
-          </a:p>
-          <a:p>
-            <a:r>
-              <a:t>slide 12 covers it as a live risk, not a hidden one.</a:t>
+              <a:t>Fallback if the live app cannot run in the room (no network, no projector HDMI for a</a:t>
+            </a:r>
+          </a:p>
+          <a:p>
+            <a:r>
+              <a:t>device, borrowed machine): the two screenshot slides before this one, or the screen</a:t>
+            </a:r>
+          </a:p>
+          <a:p>
+            <a:r>
+              <a:t>recording from docs/po/demo-script.md section 7, which is the checklist for the day</a:t>
+            </a:r>
+          </a:p>
+          <a:p>
+            <a:r>
+              <a:t>before — recording, cold rehearsal, and rotating the seeded portal password before it is</a:t>
+            </a:r>
+          </a:p>
+          <a:p>
+            <a:r>
+              <a:t>typed on a projector.</a:t>
             </a:r>
           </a:p>
           <a:p/>
           <a:p>
             <a:r>
-              <a:t>LIKELY QUESTION: "Can you show us the app?"</a:t>
-            </a:r>
-          </a:p>
-          <a:p>
-            <a:r>
-              <a:t>ANSWER: Already did, a few slides back — this slide is what's left after that, not a</a:t>
-            </a:r>
-          </a:p>
-          <a:p>
-            <a:r>
-              <a:t>substitute for it.</a:t>
+              <a:t>LIKELY QUESTION: "What if the demo breaks?"</a:t>
+            </a:r>
+          </a:p>
+          <a:p>
+            <a:r>
+              <a:t>ANSWER: Say so plainly rather than fighting it in front of the room, then either retry</a:t>
+            </a:r>
+          </a:p>
+          <a:p>
+            <a:r>
+              <a:t>once or switch to the fallback recording. A visible recovery reads better than a</a:t>
+            </a:r>
+          </a:p>
+          <a:p>
+            <a:r>
+              <a:t>stalled silence.</a:t>
             </a:r>
           </a:p>
         </p:txBody>
@@ -738,55 +750,39 @@
           <a:lstStyle/>
           <a:p>
             <a:r>
-              <a:t>Five numbers, all from the PRD. These are targets we set, not results we have.</a:t>
+              <a:t>Do not read all seven aloud. Name three: M2 is the stack running under Docker, M4 is the</a:t>
+            </a:r>
+          </a:p>
+          <a:p>
+            <a:r>
+              <a:t>core matching feature end to end, M7 is published to Play Store internal testing by Week 15.</a:t>
             </a:r>
           </a:p>
           <a:p/>
           <a:p>
             <a:r>
-              <a:t>The important one is the third: median time to first acceptance. It is the number that says</a:t>
-            </a:r>
-          </a:p>
-          <a:p>
-            <a:r>
-              <a:t>whether we actually beat a Facebook post, and it is the reason the app exists.</a:t>
+              <a:t>M7 is the assignment's hard requirement, so say the words "internal testing" explicitly.</a:t>
             </a:r>
           </a:p>
           <a:p/>
           <a:p>
             <a:r>
-              <a:t>Note that hospital-verified matters in the fourth metric. A self-reported donation is not</a:t>
-            </a:r>
-          </a:p>
-          <a:p>
-            <a:r>
-              <a:t>evidence; a donation confirmed by hospital staff is.</a:t>
-            </a:r>
-          </a:p>
-          <a:p/>
-          <a:p>
-            <a:r>
-              <a:t>LIKELY QUESTION: "How will you measure these?"</a:t>
-            </a:r>
-          </a:p>
-          <a:p>
-            <a:r>
-              <a:t>ANSWER: With SQL COUNT queries against the pilot database at demo time. We originally planned</a:t>
-            </a:r>
-          </a:p>
-          <a:p>
-            <a:r>
-              <a:t>event-capture instrumentation on every milestone and cut it — for a pilot this size the</a:t>
-            </a:r>
-          </a:p>
-          <a:p>
-            <a:r>
-              <a:t>queries give the same five numbers for none of the build cost. Be honest about the limit: if</a:t>
-            </a:r>
-          </a:p>
-          <a:p>
-            <a:r>
-              <a:t>pilot data is thin, these stay targets rather than results.</a:t>
+              <a:t>This table is generated from our planning document, not retyped — which is why it cannot</a:t>
+            </a:r>
+          </a:p>
+          <a:p>
+            <a:r>
+              <a:t>disagree with the plan. We changed three milestone rows this week when we found that</a:t>
+            </a:r>
+          </a:p>
+          <a:p>
+            <a:r>
+              <a:t>matching was scheduled before the eligibility check it depends on. The risks slide near the</a:t>
+            </a:r>
+          </a:p>
+          <a:p>
+            <a:r>
+              <a:t>end covers what's still open now.</a:t>
             </a:r>
           </a:p>
         </p:txBody>
@@ -856,80 +852,121 @@
           <a:lstStyle/>
           <a:p>
             <a:r>
-              <a:t>The Week-2 version of this slide listed two decisions as open that are now closed</a:t>
-            </a:r>
-          </a:p>
-          <a:p>
-            <a:r>
-              <a:t>(notified-donor count: ADR 0008; the deploy runbook: written) — replaced with what's</a:t>
-            </a:r>
-          </a:p>
-          <a:p>
-            <a:r>
-              <a:t>actually live today. Point this out if it's a returning audience: closed risks got removed,</a:t>
-            </a:r>
-          </a:p>
-          <a:p>
-            <a:r>
-              <a:t>not quietly forgotten.</a:t>
+              <a:t>Test counts are re-run before every rebuild of this deck, not copied forward — the previous</a:t>
+            </a:r>
+          </a:p>
+          <a:p>
+            <a:r>
+              <a:t>version of this slide said 138 backend tests, which was true in August and is not now (184).</a:t>
+            </a:r>
+          </a:p>
+          <a:p>
+            <a:r>
+              <a:t>Both numbers come from a full unpiped run on 2026-09-23: `./mvnw test` with Docker up</a:t>
+            </a:r>
+          </a:p>
+          <a:p>
+            <a:r>
+              <a:t>(184 passed, 0 skipped — the Testcontainers integration tests silently skip when Docker is</a:t>
+            </a:r>
+          </a:p>
+          <a:p>
+            <a:r>
+              <a:t>down, so "0 skipped" is the number that matters, not "BUILD SUCCESS") and `flutter test`</a:t>
+            </a:r>
+          </a:p>
+          <a:p>
+            <a:r>
+              <a:t>(189 passed).</a:t>
             </a:r>
           </a:p>
           <a:p/>
           <a:p>
             <a:r>
-              <a:t>On the tunnel: `API_BASE_URL` is baked into the signed AAB at build time, so internal</a:t>
-            </a:r>
-          </a:p>
-          <a:p>
-            <a:r>
-              <a:t>testers reach a laptop-hosted backend through ngrok/cloudflared (`DEC-007`), not a real</a:t>
-            </a:r>
-          </a:p>
-          <a:p>
-            <a:r>
-              <a:t>deploy. Chosen deliberately — a hosted deploy is new infrastructure work M7's timeline</a:t>
-            </a:r>
-          </a:p>
-          <a:p>
-            <a:r>
-              <a:t>doesn't need, and the pilot is still team-only test accounts. Revisit before any real donor</a:t>
-            </a:r>
-          </a:p>
-          <a:p>
-            <a:r>
-              <a:t>outside the team uses the app, the same trigger that brings account deletion back into scope.</a:t>
+              <a:t>"Verified live" is a deliberate phrase, not filler: a green suite has been insufficient</a:t>
+            </a:r>
+          </a:p>
+          <a:p>
+            <a:r>
+              <a:t>before on this project — a schema mismatch once shipped behind a green build because the</a:t>
+            </a:r>
+          </a:p>
+          <a:p>
+            <a:r>
+              <a:t>integration test that would have caught it skipped without Docker. Every milestone since is</a:t>
+            </a:r>
+          </a:p>
+          <a:p>
+            <a:r>
+              <a:t>checked on an actual device or browser.</a:t>
             </a:r>
           </a:p>
           <a:p/>
           <a:p>
             <a:r>
-              <a:t>On the language switch: the web portal has one (top-right, `LanguageSwitcher`); the mobile</a:t>
-            </a:r>
-          </a:p>
-          <a:p>
-            <a:r>
-              <a:t>app defaults to Khmer correctly now but has no in-app way to change it yet. Say this</a:t>
-            </a:r>
-          </a:p>
-          <a:p>
-            <a:r>
-              <a:t>plainly if asked why the phone stays in Khmer during a demo for an English speaker.</a:t>
+              <a:t>The fourth bullet is work that grew AFTER the graded milestones, in September: the public</a:t>
+            </a:r>
+          </a:p>
+          <a:p>
+            <a:r>
+              <a:t>request board (DEC-009), portal staff sign-in and the staff lifecycle replacing a</a:t>
+            </a:r>
+          </a:p>
+          <a:p>
+            <a:r>
+              <a:t>hand-pasted PORTAL_DEV_JWT (DEC-010), the mobile language switch, the intro carousel</a:t>
+            </a:r>
+          </a:p>
+          <a:p>
+            <a:r>
+              <a:t>(DEC-011), and a push-language bug where every alert went out in Khmer regardless of the</a:t>
+            </a:r>
+          </a:p>
+          <a:p>
+            <a:r>
+              <a:t>user's setting. None of it is a new FR; docs/scope.md records all of it, including the two</a:t>
+            </a:r>
+          </a:p>
+          <a:p>
+            <a:r>
+              <a:t>debts it carries. Say "grown, and written down" — the point is that scope changes are</a:t>
+            </a:r>
+          </a:p>
+          <a:p>
+            <a:r>
+              <a:t>visible, not that nothing changed.</a:t>
             </a:r>
           </a:p>
           <a:p/>
           <a:p>
             <a:r>
-              <a:t>LIKELY QUESTION: "Isn't it a problem that so much is still open this late?"</a:t>
-            </a:r>
-          </a:p>
-          <a:p>
-            <a:r>
-              <a:t>ANSWER: Compare this list to the Week-2 one — most of that list closed. What's open now is</a:t>
-            </a:r>
-          </a:p>
-          <a:p>
-            <a:r>
-              <a:t>what's genuinely still open, not a pile that never got smaller.</a:t>
+              <a:t>M7's remaining steps are execution, not design: generate the upload keystore</a:t>
+            </a:r>
+          </a:p>
+          <a:p>
+            <a:r>
+              <a:t>(docs/tech-lead/deploy-runbook.md), build the signed AAB, upload to Play Console's internal</a:t>
+            </a:r>
+          </a:p>
+          <a:p>
+            <a:r>
+              <a:t>testing track. Backend during the testing window is a tunneled laptop, not a hosted deploy</a:t>
+            </a:r>
+          </a:p>
+          <a:p>
+            <a:r>
+              <a:t>— DEC-007, and the risks slide carries it openly.</a:t>
+            </a:r>
+          </a:p>
+          <a:p/>
+          <a:p>
+            <a:r>
+              <a:t>LIKELY QUESTION: "Can you show us the app?"</a:t>
+            </a:r>
+          </a:p>
+          <a:p>
+            <a:r>
+              <a:t>ANSWER: Already did — the two screenshot slides earlier, and the live walkthrough after them.</a:t>
             </a:r>
           </a:p>
         </p:txBody>
@@ -999,6 +1036,313 @@
           <a:lstStyle/>
           <a:p>
             <a:r>
+              <a:t>Five numbers, all from the PRD. These are targets we set, not results we have.</a:t>
+            </a:r>
+          </a:p>
+          <a:p/>
+          <a:p>
+            <a:r>
+              <a:t>The important one is the third: median time to first acceptance. It is the number that says</a:t>
+            </a:r>
+          </a:p>
+          <a:p>
+            <a:r>
+              <a:t>whether we actually beat a Facebook post, and it is the reason the app exists.</a:t>
+            </a:r>
+          </a:p>
+          <a:p/>
+          <a:p>
+            <a:r>
+              <a:t>Note that hospital-verified matters in the fourth metric. A self-reported donation is not</a:t>
+            </a:r>
+          </a:p>
+          <a:p>
+            <a:r>
+              <a:t>evidence; a donation confirmed by hospital staff is.</a:t>
+            </a:r>
+          </a:p>
+          <a:p/>
+          <a:p>
+            <a:r>
+              <a:t>LIKELY QUESTION: "How will you measure these?"</a:t>
+            </a:r>
+          </a:p>
+          <a:p>
+            <a:r>
+              <a:t>ANSWER: With SQL COUNT queries against the pilot database at demo time. We originally planned</a:t>
+            </a:r>
+          </a:p>
+          <a:p>
+            <a:r>
+              <a:t>event-capture instrumentation on every milestone and cut it — for a pilot this size the</a:t>
+            </a:r>
+          </a:p>
+          <a:p>
+            <a:r>
+              <a:t>queries give the same five numbers for none of the build cost. Be honest about the limit: if</a:t>
+            </a:r>
+          </a:p>
+          <a:p>
+            <a:r>
+              <a:t>pilot data is thin, these stay targets rather than results.</a:t>
+            </a:r>
+          </a:p>
+        </p:txBody>
+      </p:sp>
+      <p:sp>
+        <p:nvSpPr>
+          <p:cNvPr id="4" name="Slide Number Placeholder 3"/>
+          <p:cNvSpPr>
+            <a:spLocks noGrp="1"/>
+          </p:cNvSpPr>
+          <p:nvPr>
+            <p:ph type="sldNum" idx="5" sz="quarter"/>
+          </p:nvPr>
+        </p:nvSpPr>
+        <p:spPr/>
+      </p:sp>
+    </p:spTree>
+  </p:cSld>
+  <p:clrMapOvr>
+    <a:masterClrMapping/>
+  </p:clrMapOvr>
+</p:notes>
+</file>
+
+<file path=ppt/notesSlides/notesSlide14.xml><?xml version="1.0" encoding="utf-8"?>
+<p:notes xmlns:a="http://schemas.openxmlformats.org/drawingml/2006/main" xmlns:p="http://schemas.openxmlformats.org/presentationml/2006/main" xmlns:r="http://schemas.openxmlformats.org/officeDocument/2006/relationships">
+  <p:cSld>
+    <p:spTree>
+      <p:nvGrpSpPr>
+        <p:cNvPr id="1" name=""/>
+        <p:cNvGrpSpPr/>
+        <p:nvPr/>
+      </p:nvGrpSpPr>
+      <p:grpSpPr>
+        <a:xfrm>
+          <a:off x="0" y="0"/>
+          <a:ext cx="0" cy="0"/>
+          <a:chOff x="0" y="0"/>
+          <a:chExt cx="0" cy="0"/>
+        </a:xfrm>
+      </p:grpSpPr>
+      <p:sp>
+        <p:nvSpPr>
+          <p:cNvPr id="2" name="Slide Image Placeholder 1"/>
+          <p:cNvSpPr>
+            <a:spLocks noGrp="1"/>
+          </p:cNvSpPr>
+          <p:nvPr>
+            <p:ph type="sldImg" idx="2"/>
+          </p:nvPr>
+        </p:nvSpPr>
+        <p:spPr/>
+      </p:sp>
+      <p:sp>
+        <p:nvSpPr>
+          <p:cNvPr id="3" name="Notes Placeholder 2"/>
+          <p:cNvSpPr>
+            <a:spLocks noGrp="1"/>
+          </p:cNvSpPr>
+          <p:nvPr>
+            <p:ph type="body" idx="3" sz="quarter"/>
+          </p:nvPr>
+        </p:nvSpPr>
+        <p:spPr/>
+        <p:txBody>
+          <a:bodyPr/>
+          <a:lstStyle/>
+          <a:p>
+            <a:r>
+              <a:t>The Week-2 version of this slide listed two decisions as open that are now closed</a:t>
+            </a:r>
+          </a:p>
+          <a:p>
+            <a:r>
+              <a:t>(notified-donor count: ADR 0008; the deploy runbook: written) — replaced with what's</a:t>
+            </a:r>
+          </a:p>
+          <a:p>
+            <a:r>
+              <a:t>actually live today. Point this out if it's a returning audience: closed risks got removed,</a:t>
+            </a:r>
+          </a:p>
+          <a:p>
+            <a:r>
+              <a:t>not quietly forgotten.</a:t>
+            </a:r>
+          </a:p>
+          <a:p/>
+          <a:p>
+            <a:r>
+              <a:t>On the tunnel: `API_BASE_URL` is baked into the signed AAB at build time, so internal</a:t>
+            </a:r>
+          </a:p>
+          <a:p>
+            <a:r>
+              <a:t>testers reach a laptop-hosted backend through ngrok/cloudflared (`DEC-007`), not a real</a:t>
+            </a:r>
+          </a:p>
+          <a:p>
+            <a:r>
+              <a:t>deploy. Chosen deliberately — a hosted deploy is new infrastructure work M7's timeline</a:t>
+            </a:r>
+          </a:p>
+          <a:p>
+            <a:r>
+              <a:t>doesn't need, and the pilot is still team-only test accounts. Revisit before any real donor</a:t>
+            </a:r>
+          </a:p>
+          <a:p>
+            <a:r>
+              <a:t>outside the team uses the app, the same trigger that brings account deletion back into scope.</a:t>
+            </a:r>
+          </a:p>
+          <a:p/>
+          <a:p>
+            <a:r>
+              <a:t>On the two security bullets, both dated the same way in docs/scope.md — fix before any real</a:t>
+            </a:r>
+          </a:p>
+          <a:p>
+            <a:r>
+              <a:t>donor's data is in this database, which is also FR-SECURITY-001's trigger. The seeded portal</a:t>
+            </a:r>
+          </a:p>
+          <a:p>
+            <a:r>
+              <a:t>password is in migrations V13-V16 and since V16 all four portal accounts share one value;</a:t>
+            </a:r>
+          </a:p>
+          <a:p>
+            <a:r>
+              <a:t>demo-runbook.md section 9 rotates it, and it must be rotated before this is demoed from a</a:t>
+            </a:r>
+          </a:p>
+          <a:p>
+            <a:r>
+              <a:t>projector. The public board publishes a named donor's blood type and district to anyone with</a:t>
+            </a:r>
+          </a:p>
+          <a:p>
+            <a:r>
+              <a:t>the link (DEC-009) — safe only because every donor row today is a team-created test account,</a:t>
+            </a:r>
+          </a:p>
+          <a:p>
+            <a:r>
+              <a:t>and there is no consent step because until that day there was nothing to consent to. Say both</a:t>
+            </a:r>
+          </a:p>
+          <a:p>
+            <a:r>
+              <a:t>out loud rather than waiting to be asked: each is a recorded choice with a recorded expiry,</a:t>
+            </a:r>
+          </a:p>
+          <a:p>
+            <a:r>
+              <a:t>which is a different thing from an oversight found at the defense.</a:t>
+            </a:r>
+          </a:p>
+          <a:p/>
+          <a:p>
+            <a:r>
+              <a:t>The language switch is no longer a risk — the mobile app got one on 2026-09-06, alongside a</a:t>
+            </a:r>
+          </a:p>
+          <a:p>
+            <a:r>
+              <a:t>fix for push alerts that had been going out in Khmer no matter what the user chose. The team-</a:t>
+            </a:r>
+          </a:p>
+          <a:p>
+            <a:r>
+              <a:t>size question moved to the closing slide, where it is asked directly.</a:t>
+            </a:r>
+          </a:p>
+          <a:p/>
+          <a:p>
+            <a:r>
+              <a:t>LIKELY QUESTION: "Isn't it a problem that so much is still open this late?"</a:t>
+            </a:r>
+          </a:p>
+          <a:p>
+            <a:r>
+              <a:t>ANSWER: Compare this list to the Week-2 one — most of that list closed. What's open now is</a:t>
+            </a:r>
+          </a:p>
+          <a:p>
+            <a:r>
+              <a:t>what's genuinely still open, not a pile that never got smaller.</a:t>
+            </a:r>
+          </a:p>
+        </p:txBody>
+      </p:sp>
+      <p:sp>
+        <p:nvSpPr>
+          <p:cNvPr id="4" name="Slide Number Placeholder 3"/>
+          <p:cNvSpPr>
+            <a:spLocks noGrp="1"/>
+          </p:cNvSpPr>
+          <p:nvPr>
+            <p:ph type="sldNum" idx="5" sz="quarter"/>
+          </p:nvPr>
+        </p:nvSpPr>
+        <p:spPr/>
+      </p:sp>
+    </p:spTree>
+  </p:cSld>
+  <p:clrMapOvr>
+    <a:masterClrMapping/>
+  </p:clrMapOvr>
+</p:notes>
+</file>
+
+<file path=ppt/notesSlides/notesSlide15.xml><?xml version="1.0" encoding="utf-8"?>
+<p:notes xmlns:a="http://schemas.openxmlformats.org/drawingml/2006/main" xmlns:p="http://schemas.openxmlformats.org/presentationml/2006/main" xmlns:r="http://schemas.openxmlformats.org/officeDocument/2006/relationships">
+  <p:cSld>
+    <p:spTree>
+      <p:nvGrpSpPr>
+        <p:cNvPr id="1" name=""/>
+        <p:cNvGrpSpPr/>
+        <p:nvPr/>
+      </p:nvGrpSpPr>
+      <p:grpSpPr>
+        <a:xfrm>
+          <a:off x="0" y="0"/>
+          <a:ext cx="0" cy="0"/>
+          <a:chOff x="0" y="0"/>
+          <a:chExt cx="0" cy="0"/>
+        </a:xfrm>
+      </p:grpSpPr>
+      <p:sp>
+        <p:nvSpPr>
+          <p:cNvPr id="2" name="Slide Image Placeholder 1"/>
+          <p:cNvSpPr>
+            <a:spLocks noGrp="1"/>
+          </p:cNvSpPr>
+          <p:nvPr>
+            <p:ph type="sldImg" idx="2"/>
+          </p:nvPr>
+        </p:nvSpPr>
+        <p:spPr/>
+      </p:sp>
+      <p:sp>
+        <p:nvSpPr>
+          <p:cNvPr id="3" name="Notes Placeholder 2"/>
+          <p:cNvSpPr>
+            <a:spLocks noGrp="1"/>
+          </p:cNvSpPr>
+          <p:nvPr>
+            <p:ph type="body" idx="3" sz="quarter"/>
+          </p:nvPr>
+        </p:nvSpPr>
+        <p:spPr/>
+        <p:txBody>
+          <a:bodyPr/>
+          <a:lstStyle/>
+          <a:p>
+            <a:r>
               <a:t>End on the question, not on thanks. Ask it directly and then stop talking.</a:t>
             </a:r>
           </a:p>
@@ -1042,7 +1386,12 @@
           </a:p>
           <a:p>
             <a:r>
-              <a:t>We know the gap: there is no deploy runbook yet, and it has to exist before the M7 release. Product definition is co-held by Sourn and Sothea, so PRD and FR sign-off is</a:t>
+              <a:t>The deploy runbook that gap referred to is written (docs/tech-lead/deploy-runbook.md); what is</a:t>
+            </a:r>
+          </a:p>
+          <a:p>
+            <a:r>
+              <a:t>left of M7 is running it. Product definition is co-held by Sourn and Sothea, so PRD and FR sign-off is</a:t>
             </a:r>
           </a:p>
           <a:p>
@@ -1819,75 +2168,65 @@
           <a:lstStyle/>
           <a:p>
             <a:r>
-              <a:t>This is the hand-off slide, not the demo itself. Say one sentence and switch devices:</a:t>
-            </a:r>
-          </a:p>
-          <a:p>
-            <a:r>
-              <a:t>"Rather than describe it, let me show it" — then tab away from the deck.</a:t>
+              <a:t>Four screens, Khmer, from a real build on a real device — not mockups, and not the</a:t>
+            </a:r>
+          </a:p>
+          <a:p>
+            <a:r>
+              <a:t>wireframes from M1. Say that once; nobody believes a screenshot is live, and it costs one</a:t>
+            </a:r>
+          </a:p>
+          <a:p>
+            <a:r>
+              <a:t>sentence to say the app is running behind it.</a:t>
             </a:r>
           </a:p>
           <a:p/>
           <a:p>
             <a:r>
-              <a:t>Everything said out loud from here follows docs/po/demo-script.md, not this slide. That</a:t>
-            </a:r>
-          </a:p>
-          <a:p>
-            <a:r>
-              <a:t>file has the full narration, plus ready answers for the questions people actually ask</a:t>
-            </a:r>
-          </a:p>
-          <a:p>
-            <a:r>
-              <a:t>mid-demo (why a phone app and not a website, what happens if nobody accepts, why there's</a:t>
-            </a:r>
-          </a:p>
-          <a:p>
-            <a:r>
-              <a:t>no map). This slide exists so the deck doesn't go straight from "here's our scope" to "any</a:t>
-            </a:r>
-          </a:p>
-          <a:p>
-            <a:r>
-              <a:t>questions" with no visible proof in between.</a:t>
+              <a:t>Left to right is the donor's actual order: the intro carousel runs once per install</a:t>
+            </a:r>
+          </a:p>
+          <a:p>
+            <a:r>
+              <a:t>(DEC-011 — the app used to ask for a Google account before saying what it wanted one for),</a:t>
+            </a:r>
+          </a:p>
+          <a:p>
+            <a:r>
+              <a:t>then home, then the two tabs a returning donor lives in.</a:t>
             </a:r>
           </a:p>
           <a:p/>
           <a:p>
             <a:r>
-              <a:t>Fallback if the live app cannot run in the room (no network, no projector HDMI for a</a:t>
-            </a:r>
-          </a:p>
-          <a:p>
-            <a:r>
-              <a:t>device, borrowed machine): docs/demo-runbook.md's golden path is short enough to walk</a:t>
-            </a:r>
-          </a:p>
-          <a:p>
-            <a:r>
-              <a:t>through as a screen-recording instead. Have one ready; do not discover you need it live.</a:t>
+              <a:t>Home is worth one extra sentence if the room is quiet: the top half is alerts matched to</a:t>
+            </a:r>
+          </a:p>
+          <a:p>
+            <a:r>
+              <a:t>you, the bottom half is the public board. GET /matches/me is empty most days by design — a</a:t>
+            </a:r>
+          </a:p>
+          <a:p>
+            <a:r>
+              <a:t>donor is only matched when someone nearby needs their type — and that emptiness used to be</a:t>
+            </a:r>
+          </a:p>
+          <a:p>
+            <a:r>
+              <a:t>the whole screen.</a:t>
             </a:r>
           </a:p>
           <a:p/>
           <a:p>
             <a:r>
-              <a:t>LIKELY QUESTION: "What if the demo breaks?"</a:t>
-            </a:r>
-          </a:p>
-          <a:p>
-            <a:r>
-              <a:t>ANSWER: Say so plainly rather than fighting it in front of the room, then either retry</a:t>
-            </a:r>
-          </a:p>
-          <a:p>
-            <a:r>
-              <a:t>once or switch to the fallback recording. A visible recovery reads better than a</a:t>
-            </a:r>
-          </a:p>
-          <a:p>
-            <a:r>
-              <a:t>stalled silence.</a:t>
+              <a:t>If the live demo cannot run in the room, this slide and the next are the fallback. Narrate</a:t>
+            </a:r>
+          </a:p>
+          <a:p>
+            <a:r>
+              <a:t>them from docs/po/demo-script.md rather than reading the captions aloud.</a:t>
             </a:r>
           </a:p>
         </p:txBody>
@@ -1957,39 +2296,60 @@
           <a:lstStyle/>
           <a:p>
             <a:r>
-              <a:t>Do not read all seven aloud. Name three: M2 is the stack running under Docker, M4 is the</a:t>
-            </a:r>
-          </a:p>
-          <a:p>
-            <a:r>
-              <a:t>core matching feature end to end, M7 is published to Play Store internal testing by Week 15.</a:t>
+              <a:t>The web half, and the answer to "why two clients" made visible: donors are on a phone</a:t>
+            </a:r>
+          </a:p>
+          <a:p>
+            <a:r>
+              <a:t>because emergencies happen away from a desk, hospital staff are at a desk with a browser.</a:t>
             </a:r>
           </a:p>
           <a:p/>
           <a:p>
             <a:r>
-              <a:t>M7 is the assignment's hard requirement, so say the words "internal testing" explicitly.</a:t>
+              <a:t>The public board (left) needs no account at all — a deliberate override of the auth threat</a:t>
+            </a:r>
+          </a:p>
+          <a:p>
+            <a:r>
+              <a:t>model, argued in DEC-009, so that a request can be shared as a link to someone who has not</a:t>
+            </a:r>
+          </a:p>
+          <a:p>
+            <a:r>
+              <a:t>installed anything. It also publishes a named donor's blood type and district, which is on</a:t>
+            </a:r>
+          </a:p>
+          <a:p>
+            <a:r>
+              <a:t>the risks slide as a debt with an expiry, not as a feature.</a:t>
             </a:r>
           </a:p>
           <a:p/>
           <a:p>
             <a:r>
-              <a:t>This table is generated from our planning document, not retyped — which is why it cannot</a:t>
-            </a:r>
-          </a:p>
-          <a:p>
-            <a:r>
-              <a:t>disagree with the plan. We changed three milestone rows this week when we found that</a:t>
-            </a:r>
-          </a:p>
-          <a:p>
-            <a:r>
-              <a:t>matching was scheduled before the eligibility check it depends on. The risks slide near the</a:t>
-            </a:r>
-          </a:p>
-          <a:p>
-            <a:r>
-              <a:t>end covers what's still open now.</a:t>
+              <a:t>Staff accounts (right) replaced a JWT pasted into a .env file by hand (DEC-010). Nobody</a:t>
+            </a:r>
+          </a:p>
+          <a:p>
+            <a:r>
+              <a:t>self-signs-up for the portal: an admin grants access to someone who has already signed in</a:t>
+            </a:r>
+          </a:p>
+          <a:p>
+            <a:r>
+              <a:t>once as an ordinary user. Mention that only if asked how hospitals get accounts.</a:t>
+            </a:r>
+          </a:p>
+          <a:p/>
+          <a:p>
+            <a:r>
+              <a:t>All three images are regenerated by the same pass that updates the README's screenshots —</a:t>
+            </a:r>
+          </a:p>
+          <a:p>
+            <a:r>
+              <a:t>docs/assets/screens/. If a screen changes, regenerate there and re-run this script.</a:t>
             </a:r>
           </a:p>
         </p:txBody>
@@ -5104,7 +5464,7 @@
                 </a:solidFill>
                 <a:latin typeface="Helvetica Neue"/>
               </a:rPr>
-              <a:t>Group 2 · Cross-Platform Mobile App Development · Track B · Week 15 of 16 · Defense</a:t>
+              <a:t>Group 2 · Cross-Platform Mobile App Development · Track B · Final Defense</a:t>
             </a:r>
           </a:p>
         </p:txBody>
@@ -5164,7 +5524,7 @@
                 </a:solidFill>
                 <a:latin typeface="Helvetica Neue"/>
               </a:rPr>
-              <a:t>WHEN</a:t>
+              <a:t>DEMO</a:t>
             </a:r>
           </a:p>
           <a:p>
@@ -5175,7 +5535,7 @@
                 </a:solidFill>
                 <a:latin typeface="Noto Sans Khmer"/>
               </a:rPr>
-              <a:t>ស្ថានភាពបច្ចុប្បន្ន</a:t>
+              <a:t>ការបង្ហាញផ្ទាល់</a:t>
             </a:r>
           </a:p>
           <a:p>
@@ -5186,7 +5546,7 @@
                 </a:solidFill>
                 <a:latin typeface="Helvetica Neue"/>
               </a:rPr>
-              <a:t>Where We Are Today</a:t>
+              <a:t>Live Walkthrough</a:t>
             </a:r>
           </a:p>
         </p:txBody>
@@ -5278,7 +5638,7 @@
                 </a:solidFill>
                 <a:latin typeface="Helvetica Neue"/>
               </a:rPr>
-              <a:t>M1 through M6 complete — verified live, not just green tests</a:t>
+              <a:t>Two devices, one browser — donor, requester, hospital portal side by side</a:t>
             </a:r>
           </a:p>
           <a:p>
@@ -5303,7 +5663,7 @@
                 </a:solidFill>
                 <a:latin typeface="Helvetica Neue"/>
               </a:rPr>
-              <a:t>Backend: 138 tests passing, real PostgreSQL via Testcontainers, BUILD SUCCESS</a:t>
+              <a:t>Donor registers — Google Sign-in, blood type, district, no password</a:t>
             </a:r>
           </a:p>
           <a:p>
@@ -5328,7 +5688,7 @@
                 </a:solidFill>
                 <a:latin typeface="Helvetica Neue"/>
               </a:rPr>
-              <a:t>Web portal and mobile app both running, tested on iOS and Android</a:t>
+              <a:t>Requester creates an urgent request — blood type, urgency, hospital</a:t>
             </a:r>
           </a:p>
           <a:p>
@@ -5353,7 +5713,7 @@
                 </a:solidFill>
                 <a:latin typeface="Helvetica Neue"/>
               </a:rPr>
-              <a:t>M7 in progress — signed AAB and Play Store upload remain</a:t>
+              <a:t>Push notification fires — instant, targeted, not a Facebook scroll</a:t>
             </a:r>
           </a:p>
           <a:p>
@@ -5378,7 +5738,32 @@
                 </a:solidFill>
                 <a:latin typeface="Helvetica Neue"/>
               </a:rPr>
-              <a:t>Cross-client design pass done: shared brand color, typography, sign-in screen</a:t>
+              <a:t>Donor accepts; hospital confirms on the portal — cooldown starts</a:t>
+            </a:r>
+          </a:p>
+          <a:p>
+            <a:pPr>
+              <a:spcAft>
+                <a:spcPts val="1400"/>
+              </a:spcAft>
+            </a:pPr>
+            <a:r>
+              <a:rPr sz="1900" b="1">
+                <a:solidFill>
+                  <a:srgbClr val="C0212E"/>
+                </a:solidFill>
+                <a:latin typeface="Helvetica Neue"/>
+              </a:rPr>
+              <a:t>▪  </a:t>
+            </a:r>
+            <a:r>
+              <a:rPr sz="1900" b="0">
+                <a:solidFill>
+                  <a:srgbClr val="1A1A2E"/>
+                </a:solidFill>
+                <a:latin typeface="Helvetica Neue"/>
+              </a:rPr>
+              <a:t>Full script: docs/po/demo-script.md — narration for every step</a:t>
             </a:r>
           </a:p>
         </p:txBody>
@@ -5412,7 +5797,7 @@
                 </a:solidFill>
                 <a:latin typeface="Helvetica Neue"/>
               </a:rPr>
-              <a:t>LifeLink KH · Group 2 · Track B · Week 15 of 16 · Defense</a:t>
+              <a:t>LifeLink KH · Group 2 · Track B · Final Defense (Week 16)</a:t>
             </a:r>
           </a:p>
         </p:txBody>
@@ -5472,7 +5857,7 @@
                 </a:solidFill>
                 <a:latin typeface="Helvetica Neue"/>
               </a:rPr>
-              <a:t>MEASURE</a:t>
+              <a:t>WHEN</a:t>
             </a:r>
           </a:p>
           <a:p>
@@ -5483,7 +5868,7 @@
                 </a:solidFill>
                 <a:latin typeface="Noto Sans Khmer"/>
               </a:rPr>
-              <a:t>សូចនាករជោគជ័យ</a:t>
+              <a:t>ដំណាក់កាលការងារ</a:t>
             </a:r>
           </a:p>
           <a:p>
@@ -5494,7 +5879,7 @@
                 </a:solidFill>
                 <a:latin typeface="Helvetica Neue"/>
               </a:rPr>
-              <a:t>Success Metrics</a:t>
+              <a:t>Milestones · M1 → M7</a:t>
             </a:r>
           </a:p>
         </p:txBody>
@@ -5551,8 +5936,8 @@
         </p:nvSpPr>
         <p:spPr>
           <a:xfrm>
-            <a:off x="822960" y="2468880"/>
-            <a:ext cx="10515600" cy="3657600"/>
+            <a:off x="822960" y="2331720"/>
+            <a:ext cx="10607040" cy="3749039"/>
           </a:xfrm>
           <a:prstGeom prst="rect">
             <a:avLst/>
@@ -5567,126 +5952,239 @@
           <a:p>
             <a:pPr>
               <a:spcAft>
-                <a:spcPts val="1400"/>
+                <a:spcPts val="900"/>
               </a:spcAft>
             </a:pPr>
             <a:r>
-              <a:rPr sz="1900" b="1">
-                <a:solidFill>
-                  <a:srgbClr val="C0212E"/>
-                </a:solidFill>
-                <a:latin typeface="Helvetica Neue"/>
-              </a:rPr>
-              <a:t>▪  </a:t>
-            </a:r>
-            <a:r>
-              <a:rPr sz="1900" b="0">
+              <a:rPr sz="1700" b="1">
+                <a:solidFill>
+                  <a:srgbClr val="0F6B5F"/>
+                </a:solidFill>
+                <a:latin typeface="Helvetica Neue"/>
+              </a:rPr>
+              <a:t>M1  </a:t>
+            </a:r>
+            <a:r>
+              <a:rPr sz="1500" b="0">
+                <a:solidFill>
+                  <a:srgbClr val="5A5A6E"/>
+                </a:solidFill>
+                <a:latin typeface="Helvetica Neue"/>
+              </a:rPr>
+              <a:t>W3-4      </a:t>
+            </a:r>
+            <a:r>
+              <a:rPr sz="1500" b="0">
                 <a:solidFill>
                   <a:srgbClr val="1A1A2E"/>
                 </a:solidFill>
                 <a:latin typeface="Helvetica Neue"/>
               </a:rPr>
-              <a:t>≥ 200 registered donors in Phnom Penh in the first pilot month</a:t>
+              <a:t>ERD (done), wireframes for the 4 core screens only, API spec for the 8 core FRs</a:t>
             </a:r>
           </a:p>
           <a:p>
             <a:pPr>
               <a:spcAft>
-                <a:spcPts val="1400"/>
+                <a:spcPts val="900"/>
               </a:spcAft>
             </a:pPr>
             <a:r>
-              <a:rPr sz="1900" b="1">
-                <a:solidFill>
-                  <a:srgbClr val="C0212E"/>
-                </a:solidFill>
-                <a:latin typeface="Helvetica Neue"/>
-              </a:rPr>
-              <a:t>▪  </a:t>
-            </a:r>
-            <a:r>
-              <a:rPr sz="1900" b="0">
+              <a:rPr sz="1700" b="1">
+                <a:solidFill>
+                  <a:srgbClr val="0F6B5F"/>
+                </a:solidFill>
+                <a:latin typeface="Helvetica Neue"/>
+              </a:rPr>
+              <a:t>M2  </a:t>
+            </a:r>
+            <a:r>
+              <a:rPr sz="1500" b="0">
+                <a:solidFill>
+                  <a:srgbClr val="5A5A6E"/>
+                </a:solidFill>
+                <a:latin typeface="Helvetica Neue"/>
+              </a:rPr>
+              <a:t>W5-6      </a:t>
+            </a:r>
+            <a:r>
+              <a:rPr sz="1500" b="0">
                 <a:solidFill>
                   <a:srgbClr val="1A1A2E"/>
                 </a:solidFill>
                 <a:latin typeface="Helvetica Neue"/>
               </a:rPr>
-              <a:t>≥ 70% of urgent requests get an acceptance within 60 minutes</a:t>
+              <a:t>Spring Boot init (PostgreSQL, Flyway), Flutter + Next.js init, docker-compose up runs backend…</a:t>
             </a:r>
           </a:p>
           <a:p>
             <a:pPr>
               <a:spcAft>
-                <a:spcPts val="1400"/>
+                <a:spcPts val="900"/>
               </a:spcAft>
             </a:pPr>
             <a:r>
-              <a:rPr sz="1900" b="1">
-                <a:solidFill>
-                  <a:srgbClr val="C0212E"/>
-                </a:solidFill>
-                <a:latin typeface="Helvetica Neue"/>
-              </a:rPr>
-              <a:t>▪  </a:t>
-            </a:r>
-            <a:r>
-              <a:rPr sz="1900" b="0">
+              <a:rPr sz="1700" b="1">
+                <a:solidFill>
+                  <a:srgbClr val="0F6B5F"/>
+                </a:solidFill>
+                <a:latin typeface="Helvetica Neue"/>
+              </a:rPr>
+              <a:t>M3  </a:t>
+            </a:r>
+            <a:r>
+              <a:rPr sz="1500" b="0">
+                <a:solidFill>
+                  <a:srgbClr val="5A5A6E"/>
+                </a:solidFill>
+                <a:latin typeface="Helvetica Neue"/>
+              </a:rPr>
+              <a:t>W7-9      </a:t>
+            </a:r>
+            <a:r>
+              <a:rPr sz="1500" b="0">
                 <a:solidFill>
                   <a:srgbClr val="1A1A2E"/>
                 </a:solidFill>
                 <a:latin typeface="Helvetica Neue"/>
               </a:rPr>
-              <a:t>Median time from request to first acceptance under 30 minutes</a:t>
+              <a:t>Google Sign-In + donor register + FCM token registration end-to-end (feature 1)</a:t>
             </a:r>
           </a:p>
           <a:p>
             <a:pPr>
               <a:spcAft>
-                <a:spcPts val="1400"/>
+                <a:spcPts val="900"/>
               </a:spcAft>
             </a:pPr>
             <a:r>
-              <a:rPr sz="1900" b="1">
-                <a:solidFill>
-                  <a:srgbClr val="C0212E"/>
-                </a:solidFill>
-                <a:latin typeface="Helvetica Neue"/>
-              </a:rPr>
-              <a:t>▪  </a:t>
-            </a:r>
-            <a:r>
-              <a:rPr sz="1900" b="0">
+              <a:rPr sz="1700" b="1">
+                <a:solidFill>
+                  <a:srgbClr val="0F6B5F"/>
+                </a:solidFill>
+                <a:latin typeface="Helvetica Neue"/>
+              </a:rPr>
+              <a:t>M4  </a:t>
+            </a:r>
+            <a:r>
+              <a:rPr sz="1500" b="0">
+                <a:solidFill>
+                  <a:srgbClr val="5A5A6E"/>
+                </a:solidFill>
+                <a:latin typeface="Helvetica Neue"/>
+              </a:rPr>
+              <a:t>W10-12    </a:t>
+            </a:r>
+            <a:r>
+              <a:rPr sz="1500" b="0">
                 <a:solidFill>
                   <a:srgbClr val="1A1A2E"/>
                 </a:solidFill>
                 <a:latin typeface="Helvetica Neue"/>
               </a:rPr>
-              <a:t>≥ 50 completed, hospital-verified donations during the pilot semester</a:t>
+              <a:t>Request create + ABO/Rh and distance matching + eligibility computation + request-alert push…</a:t>
             </a:r>
           </a:p>
           <a:p>
             <a:pPr>
               <a:spcAft>
-                <a:spcPts val="1400"/>
+                <a:spcPts val="900"/>
               </a:spcAft>
             </a:pPr>
             <a:r>
-              <a:rPr sz="1900" b="1">
+              <a:rPr sz="1700" b="1">
+                <a:solidFill>
+                  <a:srgbClr val="0F6B5F"/>
+                </a:solidFill>
+                <a:latin typeface="Helvetica Neue"/>
+              </a:rPr>
+              <a:t>M5  </a:t>
+            </a:r>
+            <a:r>
+              <a:rPr sz="1500" b="0">
+                <a:solidFill>
+                  <a:srgbClr val="5A5A6E"/>
+                </a:solidFill>
+                <a:latin typeface="Helvetica Neue"/>
+              </a:rPr>
+              <a:t>W13       </a:t>
+            </a:r>
+            <a:r>
+              <a:rPr sz="1500" b="0">
+                <a:solidFill>
+                  <a:srgbClr val="1A1A2E"/>
+                </a:solidFill>
+                <a:latin typeface="Helvetica Neue"/>
+              </a:rPr>
+              <a:t>Donation history list + 56-day eligibility status + the single hospital web page (feature 3)</a:t>
+            </a:r>
+          </a:p>
+          <a:p>
+            <a:pPr>
+              <a:spcAft>
+                <a:spcPts val="900"/>
+              </a:spcAft>
+            </a:pPr>
+            <a:r>
+              <a:rPr sz="1700" b="1">
+                <a:solidFill>
+                  <a:srgbClr val="0F6B5F"/>
+                </a:solidFill>
+                <a:latin typeface="Helvetica Neue"/>
+              </a:rPr>
+              <a:t>M6  </a:t>
+            </a:r>
+            <a:r>
+              <a:rPr sz="1500" b="0">
+                <a:solidFill>
+                  <a:srgbClr val="5A5A6E"/>
+                </a:solidFill>
+                <a:latin typeface="Helvetica Neue"/>
+              </a:rPr>
+              <a:t>W14       </a:t>
+            </a:r>
+            <a:r>
+              <a:rPr sz="1500" b="0">
+                <a:solidFill>
+                  <a:srgbClr val="1A1A2E"/>
+                </a:solidFill>
+                <a:latin typeface="Helvetica Neue"/>
+              </a:rPr>
+              <a:t>GPS via geolocator, Khmer/English i18n, Android build, iOS build (device/simulator only, DEC-…</a:t>
+            </a:r>
+          </a:p>
+          <a:p>
+            <a:pPr>
+              <a:spcAft>
+                <a:spcPts val="900"/>
+              </a:spcAft>
+            </a:pPr>
+            <a:r>
+              <a:rPr sz="1700" b="1">
                 <a:solidFill>
                   <a:srgbClr val="C0212E"/>
                 </a:solidFill>
                 <a:latin typeface="Helvetica Neue"/>
               </a:rPr>
-              <a:t>▪  </a:t>
-            </a:r>
-            <a:r>
-              <a:rPr sz="1900" b="0">
+              <a:t>M7  </a:t>
+            </a:r>
+            <a:r>
+              <a:rPr sz="1500" b="0">
+                <a:solidFill>
+                  <a:srgbClr val="5A5A6E"/>
+                </a:solidFill>
+                <a:latin typeface="Helvetica Neue"/>
+              </a:rPr>
+              <a:t>W15       </a:t>
+            </a:r>
+            <a:r>
+              <a:rPr sz="1500" b="1">
                 <a:solidFill>
                   <a:srgbClr val="1A1A2E"/>
                 </a:solidFill>
                 <a:latin typeface="Helvetica Neue"/>
               </a:rPr>
-              <a:t>Push notification delivery rate ≥ 95%</a:t>
+              <a:t>Test pass, signed AAB, Flutter app published to Play Store internal testing</a:t>
             </a:r>
           </a:p>
         </p:txBody>
@@ -5720,7 +6218,7 @@
                 </a:solidFill>
                 <a:latin typeface="Helvetica Neue"/>
               </a:rPr>
-              <a:t>LifeLink KH · Group 2 · Track B · Week 15 of 16 · Defense</a:t>
+              <a:t>Parsed from CLAUDE.md section 4 — the single source for milestone dates</a:t>
             </a:r>
           </a:p>
         </p:txBody>
@@ -5780,7 +6278,7 @@
                 </a:solidFill>
                 <a:latin typeface="Helvetica Neue"/>
               </a:rPr>
-              <a:t>HONEST</a:t>
+              <a:t>WHEN</a:t>
             </a:r>
           </a:p>
           <a:p>
@@ -5791,7 +6289,7 @@
                 </a:solidFill>
                 <a:latin typeface="Noto Sans Khmer"/>
               </a:rPr>
-              <a:t>ហានិភ័យ និងការសម្រេចចិត្ត</a:t>
+              <a:t>ស្ថានភាពបច្ចុប្បន្ន</a:t>
             </a:r>
           </a:p>
           <a:p>
@@ -5802,7 +6300,7 @@
                 </a:solidFill>
                 <a:latin typeface="Helvetica Neue"/>
               </a:rPr>
-              <a:t>Risks + Open Decisions</a:t>
+              <a:t>Where We Are Today</a:t>
             </a:r>
           </a:p>
         </p:txBody>
@@ -5894,7 +6392,7 @@
                 </a:solidFill>
                 <a:latin typeface="Helvetica Neue"/>
               </a:rPr>
-              <a:t>M7 backend runs on a tunneled laptop, not hosted infrastructure</a:t>
+              <a:t>M1 through M6 complete — verified live on device, not just tests</a:t>
             </a:r>
           </a:p>
           <a:p>
@@ -5919,7 +6417,7 @@
                 </a:solidFill>
                 <a:latin typeface="Helvetica Neue"/>
               </a:rPr>
-              <a:t>Donor phone numbers unverified — coordination happens through push, not calls</a:t>
+              <a:t>Backend: 184 tests green against real PostgreSQL via Testcontainers</a:t>
             </a:r>
           </a:p>
           <a:p>
@@ -5944,7 +6442,7 @@
                 </a:solidFill>
                 <a:latin typeface="Helvetica Neue"/>
               </a:rPr>
-              <a:t>Low donor density early — needs campus and NGO onboarding drives</a:t>
+              <a:t>Mobile: 189 tests green — iOS and Android both build today</a:t>
             </a:r>
           </a:p>
           <a:p>
@@ -5969,7 +6467,7 @@
                 </a:solidFill>
                 <a:latin typeface="Helvetica Neue"/>
               </a:rPr>
-              <a:t>Account and data deletion deferred — must ship before real donors</a:t>
+              <a:t>Since M7: public request board, portal staff accounts, mobile language switch</a:t>
             </a:r>
           </a:p>
           <a:p>
@@ -5994,32 +6492,7 @@
                 </a:solidFill>
                 <a:latin typeface="Helvetica Neue"/>
               </a:rPr>
-              <a:t>Mobile has no language switch yet — Khmer only until built</a:t>
-            </a:r>
-          </a:p>
-          <a:p>
-            <a:pPr>
-              <a:spcAft>
-                <a:spcPts val="1400"/>
-              </a:spcAft>
-            </a:pPr>
-            <a:r>
-              <a:rPr sz="1900" b="1">
-                <a:solidFill>
-                  <a:srgbClr val="C0212E"/>
-                </a:solidFill>
-                <a:latin typeface="Helvetica Neue"/>
-              </a:rPr>
-              <a:t>▪  </a:t>
-            </a:r>
-            <a:r>
-              <a:rPr sz="1900" b="0">
-                <a:solidFill>
-                  <a:srgbClr val="1A1A2E"/>
-                </a:solidFill>
-                <a:latin typeface="Helvetica Neue"/>
-              </a:rPr>
-              <a:t>Five-person team versus the assignment's three — open with instructor</a:t>
+              <a:t>M7 remains: signed AAB and Play Console internal-testing upload</a:t>
             </a:r>
           </a:p>
         </p:txBody>
@@ -6053,7 +6526,7 @@
                 </a:solidFill>
                 <a:latin typeface="Helvetica Neue"/>
               </a:rPr>
-              <a:t>LifeLink KH · Group 2 · Track B · Week 15 of 16 · Defense</a:t>
+              <a:t>LifeLink KH · Group 2 · Track B · Final Defense (Week 16)</a:t>
             </a:r>
           </a:p>
         </p:txBody>
@@ -6113,7 +6586,7 @@
                 </a:solidFill>
                 <a:latin typeface="Helvetica Neue"/>
               </a:rPr>
-              <a:t>WHO BUILDS IT</a:t>
+              <a:t>MEASURE</a:t>
             </a:r>
           </a:p>
           <a:p>
@@ -6124,7 +6597,7 @@
                 </a:solidFill>
                 <a:latin typeface="Noto Sans Khmer"/>
               </a:rPr>
-              <a:t>ក្រុមការងារ</a:t>
+              <a:t>សូចនាករជោគជ័យ</a:t>
             </a:r>
           </a:p>
           <a:p>
@@ -6135,7 +6608,7 @@
                 </a:solidFill>
                 <a:latin typeface="Helvetica Neue"/>
               </a:rPr>
-              <a:t>Team + One Open Question</a:t>
+              <a:t>Success Metrics</a:t>
             </a:r>
           </a:p>
         </p:txBody>
@@ -6192,6 +6665,647 @@
         </p:nvSpPr>
         <p:spPr>
           <a:xfrm>
+            <a:off x="822960" y="2468880"/>
+            <a:ext cx="10515600" cy="3657600"/>
+          </a:xfrm>
+          <a:prstGeom prst="rect">
+            <a:avLst/>
+          </a:prstGeom>
+          <a:noFill/>
+        </p:spPr>
+        <p:txBody>
+          <a:bodyPr wrap="square">
+            <a:spAutoFit/>
+          </a:bodyPr>
+          <a:lstStyle/>
+          <a:p>
+            <a:pPr>
+              <a:spcAft>
+                <a:spcPts val="1400"/>
+              </a:spcAft>
+            </a:pPr>
+            <a:r>
+              <a:rPr sz="1900" b="1">
+                <a:solidFill>
+                  <a:srgbClr val="C0212E"/>
+                </a:solidFill>
+                <a:latin typeface="Helvetica Neue"/>
+              </a:rPr>
+              <a:t>▪  </a:t>
+            </a:r>
+            <a:r>
+              <a:rPr sz="1900" b="0">
+                <a:solidFill>
+                  <a:srgbClr val="1A1A2E"/>
+                </a:solidFill>
+                <a:latin typeface="Helvetica Neue"/>
+              </a:rPr>
+              <a:t>≥ 200 registered donors in Phnom Penh in the first pilot month</a:t>
+            </a:r>
+          </a:p>
+          <a:p>
+            <a:pPr>
+              <a:spcAft>
+                <a:spcPts val="1400"/>
+              </a:spcAft>
+            </a:pPr>
+            <a:r>
+              <a:rPr sz="1900" b="1">
+                <a:solidFill>
+                  <a:srgbClr val="C0212E"/>
+                </a:solidFill>
+                <a:latin typeface="Helvetica Neue"/>
+              </a:rPr>
+              <a:t>▪  </a:t>
+            </a:r>
+            <a:r>
+              <a:rPr sz="1900" b="0">
+                <a:solidFill>
+                  <a:srgbClr val="1A1A2E"/>
+                </a:solidFill>
+                <a:latin typeface="Helvetica Neue"/>
+              </a:rPr>
+              <a:t>≥ 70% of urgent requests get an acceptance within 60 minutes</a:t>
+            </a:r>
+          </a:p>
+          <a:p>
+            <a:pPr>
+              <a:spcAft>
+                <a:spcPts val="1400"/>
+              </a:spcAft>
+            </a:pPr>
+            <a:r>
+              <a:rPr sz="1900" b="1">
+                <a:solidFill>
+                  <a:srgbClr val="C0212E"/>
+                </a:solidFill>
+                <a:latin typeface="Helvetica Neue"/>
+              </a:rPr>
+              <a:t>▪  </a:t>
+            </a:r>
+            <a:r>
+              <a:rPr sz="1900" b="0">
+                <a:solidFill>
+                  <a:srgbClr val="1A1A2E"/>
+                </a:solidFill>
+                <a:latin typeface="Helvetica Neue"/>
+              </a:rPr>
+              <a:t>Median time from request to first acceptance under 30 minutes</a:t>
+            </a:r>
+          </a:p>
+          <a:p>
+            <a:pPr>
+              <a:spcAft>
+                <a:spcPts val="1400"/>
+              </a:spcAft>
+            </a:pPr>
+            <a:r>
+              <a:rPr sz="1900" b="1">
+                <a:solidFill>
+                  <a:srgbClr val="C0212E"/>
+                </a:solidFill>
+                <a:latin typeface="Helvetica Neue"/>
+              </a:rPr>
+              <a:t>▪  </a:t>
+            </a:r>
+            <a:r>
+              <a:rPr sz="1900" b="0">
+                <a:solidFill>
+                  <a:srgbClr val="1A1A2E"/>
+                </a:solidFill>
+                <a:latin typeface="Helvetica Neue"/>
+              </a:rPr>
+              <a:t>≥ 50 completed, hospital-verified donations during the pilot semester</a:t>
+            </a:r>
+          </a:p>
+          <a:p>
+            <a:pPr>
+              <a:spcAft>
+                <a:spcPts val="1400"/>
+              </a:spcAft>
+            </a:pPr>
+            <a:r>
+              <a:rPr sz="1900" b="1">
+                <a:solidFill>
+                  <a:srgbClr val="C0212E"/>
+                </a:solidFill>
+                <a:latin typeface="Helvetica Neue"/>
+              </a:rPr>
+              <a:t>▪  </a:t>
+            </a:r>
+            <a:r>
+              <a:rPr sz="1900" b="0">
+                <a:solidFill>
+                  <a:srgbClr val="1A1A2E"/>
+                </a:solidFill>
+                <a:latin typeface="Helvetica Neue"/>
+              </a:rPr>
+              <a:t>Push notification delivery rate ≥ 95%</a:t>
+            </a:r>
+          </a:p>
+        </p:txBody>
+      </p:sp>
+      <p:sp>
+        <p:nvSpPr>
+          <p:cNvPr id="5" name="TextBox 4"/>
+          <p:cNvSpPr txBox="1"/>
+          <p:nvPr/>
+        </p:nvSpPr>
+        <p:spPr>
+          <a:xfrm>
+            <a:off x="777240" y="6263640"/>
+            <a:ext cx="10607040" cy="365760"/>
+          </a:xfrm>
+          <a:prstGeom prst="rect">
+            <a:avLst/>
+          </a:prstGeom>
+          <a:noFill/>
+        </p:spPr>
+        <p:txBody>
+          <a:bodyPr wrap="square">
+            <a:spAutoFit/>
+          </a:bodyPr>
+          <a:lstStyle/>
+          <a:p>
+            <a:r>
+              <a:rPr sz="1200" b="0">
+                <a:solidFill>
+                  <a:srgbClr val="5A5A6E"/>
+                </a:solidFill>
+                <a:latin typeface="Helvetica Neue"/>
+              </a:rPr>
+              <a:t>LifeLink KH · Group 2 · Track B · Final Defense (Week 16)</a:t>
+            </a:r>
+          </a:p>
+        </p:txBody>
+      </p:sp>
+    </p:spTree>
+  </p:cSld>
+  <p:clrMapOvr>
+    <a:masterClrMapping/>
+  </p:clrMapOvr>
+</p:sld>
+</file>
+
+<file path=ppt/slides/slide14.xml><?xml version="1.0" encoding="utf-8"?>
+<p:sld xmlns:a="http://schemas.openxmlformats.org/drawingml/2006/main" xmlns:p="http://schemas.openxmlformats.org/presentationml/2006/main" xmlns:r="http://schemas.openxmlformats.org/officeDocument/2006/relationships">
+  <p:cSld>
+    <p:bg>
+      <p:bgPr>
+        <a:solidFill>
+          <a:srgbClr val="FAFAF7"/>
+        </a:solidFill>
+        <a:effectLst/>
+      </p:bgPr>
+    </p:bg>
+    <p:spTree>
+      <p:nvGrpSpPr>
+        <p:cNvPr id="1" name=""/>
+        <p:cNvGrpSpPr/>
+        <p:nvPr/>
+      </p:nvGrpSpPr>
+      <p:grpSpPr/>
+      <p:sp>
+        <p:nvSpPr>
+          <p:cNvPr id="2" name="TextBox 1"/>
+          <p:cNvSpPr txBox="1"/>
+          <p:nvPr/>
+        </p:nvSpPr>
+        <p:spPr>
+          <a:xfrm>
+            <a:off x="731520" y="411480"/>
+            <a:ext cx="10698480" cy="1554480"/>
+          </a:xfrm>
+          <a:prstGeom prst="rect">
+            <a:avLst/>
+          </a:prstGeom>
+          <a:noFill/>
+        </p:spPr>
+        <p:txBody>
+          <a:bodyPr wrap="square">
+            <a:spAutoFit/>
+          </a:bodyPr>
+          <a:lstStyle/>
+          <a:p>
+            <a:r>
+              <a:rPr sz="1500" b="1">
+                <a:solidFill>
+                  <a:srgbClr val="0F6B5F"/>
+                </a:solidFill>
+                <a:latin typeface="Helvetica Neue"/>
+              </a:rPr>
+              <a:t>HONEST</a:t>
+            </a:r>
+          </a:p>
+          <a:p>
+            <a:r>
+              <a:rPr sz="3000" b="1">
+                <a:solidFill>
+                  <a:srgbClr val="1A1A2E"/>
+                </a:solidFill>
+                <a:latin typeface="Noto Sans Khmer"/>
+              </a:rPr>
+              <a:t>ហានិភ័យ និងការសម្រេចចិត្ត</a:t>
+            </a:r>
+          </a:p>
+          <a:p>
+            <a:r>
+              <a:rPr sz="3400" b="1">
+                <a:solidFill>
+                  <a:srgbClr val="C0212E"/>
+                </a:solidFill>
+                <a:latin typeface="Helvetica Neue"/>
+              </a:rPr>
+              <a:t>Risks + Open Decisions</a:t>
+            </a:r>
+          </a:p>
+        </p:txBody>
+      </p:sp>
+      <p:sp>
+        <p:nvSpPr>
+          <p:cNvPr id="3" name="Rectangle 2"/>
+          <p:cNvSpPr/>
+          <p:nvPr/>
+        </p:nvSpPr>
+        <p:spPr>
+          <a:xfrm>
+            <a:off x="777240" y="2084831"/>
+            <a:ext cx="1280160" cy="34925"/>
+          </a:xfrm>
+          <a:prstGeom prst="rect">
+            <a:avLst/>
+          </a:prstGeom>
+          <a:solidFill>
+            <a:srgbClr val="C0212E"/>
+          </a:solidFill>
+          <a:ln>
+            <a:noFill/>
+          </a:ln>
+          <a:effectLst/>
+        </p:spPr>
+        <p:style>
+          <a:lnRef idx="1">
+            <a:schemeClr val="accent1"/>
+          </a:lnRef>
+          <a:fillRef idx="3">
+            <a:schemeClr val="accent1"/>
+          </a:fillRef>
+          <a:effectRef idx="2">
+            <a:schemeClr val="accent1"/>
+          </a:effectRef>
+          <a:fontRef idx="minor">
+            <a:schemeClr val="lt1"/>
+          </a:fontRef>
+        </p:style>
+        <p:txBody>
+          <a:bodyPr rtlCol="0" anchor="ctr"/>
+          <a:lstStyle/>
+          <a:p>
+            <a:pPr algn="ctr"/>
+          </a:p>
+        </p:txBody>
+      </p:sp>
+      <p:sp>
+        <p:nvSpPr>
+          <p:cNvPr id="4" name="TextBox 3"/>
+          <p:cNvSpPr txBox="1"/>
+          <p:nvPr/>
+        </p:nvSpPr>
+        <p:spPr>
+          <a:xfrm>
+            <a:off x="822960" y="2468880"/>
+            <a:ext cx="10515600" cy="3657600"/>
+          </a:xfrm>
+          <a:prstGeom prst="rect">
+            <a:avLst/>
+          </a:prstGeom>
+          <a:noFill/>
+        </p:spPr>
+        <p:txBody>
+          <a:bodyPr wrap="square">
+            <a:spAutoFit/>
+          </a:bodyPr>
+          <a:lstStyle/>
+          <a:p>
+            <a:pPr>
+              <a:spcAft>
+                <a:spcPts val="1400"/>
+              </a:spcAft>
+            </a:pPr>
+            <a:r>
+              <a:rPr sz="1900" b="1">
+                <a:solidFill>
+                  <a:srgbClr val="C0212E"/>
+                </a:solidFill>
+                <a:latin typeface="Helvetica Neue"/>
+              </a:rPr>
+              <a:t>▪  </a:t>
+            </a:r>
+            <a:r>
+              <a:rPr sz="1900" b="0">
+                <a:solidFill>
+                  <a:srgbClr val="1A1A2E"/>
+                </a:solidFill>
+                <a:latin typeface="Helvetica Neue"/>
+              </a:rPr>
+              <a:t>M7 backend runs on a tunneled laptop, not hosted infrastructure</a:t>
+            </a:r>
+          </a:p>
+          <a:p>
+            <a:pPr>
+              <a:spcAft>
+                <a:spcPts val="1400"/>
+              </a:spcAft>
+            </a:pPr>
+            <a:r>
+              <a:rPr sz="1900" b="1">
+                <a:solidFill>
+                  <a:srgbClr val="C0212E"/>
+                </a:solidFill>
+                <a:latin typeface="Helvetica Neue"/>
+              </a:rPr>
+              <a:t>▪  </a:t>
+            </a:r>
+            <a:r>
+              <a:rPr sz="1900" b="0">
+                <a:solidFill>
+                  <a:srgbClr val="1A1A2E"/>
+                </a:solidFill>
+                <a:latin typeface="Helvetica Neue"/>
+              </a:rPr>
+              <a:t>Donor phone numbers unverified — coordination happens through push, not calls</a:t>
+            </a:r>
+          </a:p>
+          <a:p>
+            <a:pPr>
+              <a:spcAft>
+                <a:spcPts val="1400"/>
+              </a:spcAft>
+            </a:pPr>
+            <a:r>
+              <a:rPr sz="1900" b="1">
+                <a:solidFill>
+                  <a:srgbClr val="C0212E"/>
+                </a:solidFill>
+                <a:latin typeface="Helvetica Neue"/>
+              </a:rPr>
+              <a:t>▪  </a:t>
+            </a:r>
+            <a:r>
+              <a:rPr sz="1900" b="0">
+                <a:solidFill>
+                  <a:srgbClr val="1A1A2E"/>
+                </a:solidFill>
+                <a:latin typeface="Helvetica Neue"/>
+              </a:rPr>
+              <a:t>Low donor density early — needs campus and NGO onboarding drives</a:t>
+            </a:r>
+          </a:p>
+          <a:p>
+            <a:pPr>
+              <a:spcAft>
+                <a:spcPts val="1400"/>
+              </a:spcAft>
+            </a:pPr>
+            <a:r>
+              <a:rPr sz="1900" b="1">
+                <a:solidFill>
+                  <a:srgbClr val="C0212E"/>
+                </a:solidFill>
+                <a:latin typeface="Helvetica Neue"/>
+              </a:rPr>
+              <a:t>▪  </a:t>
+            </a:r>
+            <a:r>
+              <a:rPr sz="1900" b="0">
+                <a:solidFill>
+                  <a:srgbClr val="1A1A2E"/>
+                </a:solidFill>
+                <a:latin typeface="Helvetica Neue"/>
+              </a:rPr>
+              <a:t>Account and data deletion deferred — must ship before real donors</a:t>
+            </a:r>
+          </a:p>
+          <a:p>
+            <a:pPr>
+              <a:spcAft>
+                <a:spcPts val="1400"/>
+              </a:spcAft>
+            </a:pPr>
+            <a:r>
+              <a:rPr sz="1900" b="1">
+                <a:solidFill>
+                  <a:srgbClr val="C0212E"/>
+                </a:solidFill>
+                <a:latin typeface="Helvetica Neue"/>
+              </a:rPr>
+              <a:t>▪  </a:t>
+            </a:r>
+            <a:r>
+              <a:rPr sz="1900" b="0">
+                <a:solidFill>
+                  <a:srgbClr val="1A1A2E"/>
+                </a:solidFill>
+                <a:latin typeface="Helvetica Neue"/>
+              </a:rPr>
+              <a:t>Seeded portal password sits in the repository — rotate before real data</a:t>
+            </a:r>
+          </a:p>
+          <a:p>
+            <a:pPr>
+              <a:spcAft>
+                <a:spcPts val="1400"/>
+              </a:spcAft>
+            </a:pPr>
+            <a:r>
+              <a:rPr sz="1900" b="1">
+                <a:solidFill>
+                  <a:srgbClr val="C0212E"/>
+                </a:solidFill>
+                <a:latin typeface="Helvetica Neue"/>
+              </a:rPr>
+              <a:t>▪  </a:t>
+            </a:r>
+            <a:r>
+              <a:rPr sz="1900" b="0">
+                <a:solidFill>
+                  <a:srgbClr val="1A1A2E"/>
+                </a:solidFill>
+                <a:latin typeface="Helvetica Neue"/>
+              </a:rPr>
+              <a:t>Public board shows donor names — deliberate, no consent step yet</a:t>
+            </a:r>
+          </a:p>
+        </p:txBody>
+      </p:sp>
+      <p:sp>
+        <p:nvSpPr>
+          <p:cNvPr id="5" name="TextBox 4"/>
+          <p:cNvSpPr txBox="1"/>
+          <p:nvPr/>
+        </p:nvSpPr>
+        <p:spPr>
+          <a:xfrm>
+            <a:off x="777240" y="6263640"/>
+            <a:ext cx="10607040" cy="365760"/>
+          </a:xfrm>
+          <a:prstGeom prst="rect">
+            <a:avLst/>
+          </a:prstGeom>
+          <a:noFill/>
+        </p:spPr>
+        <p:txBody>
+          <a:bodyPr wrap="square">
+            <a:spAutoFit/>
+          </a:bodyPr>
+          <a:lstStyle/>
+          <a:p>
+            <a:r>
+              <a:rPr sz="1200" b="0">
+                <a:solidFill>
+                  <a:srgbClr val="5A5A6E"/>
+                </a:solidFill>
+                <a:latin typeface="Helvetica Neue"/>
+              </a:rPr>
+              <a:t>LifeLink KH · Group 2 · Track B · Final Defense (Week 16)</a:t>
+            </a:r>
+          </a:p>
+        </p:txBody>
+      </p:sp>
+    </p:spTree>
+  </p:cSld>
+  <p:clrMapOvr>
+    <a:masterClrMapping/>
+  </p:clrMapOvr>
+</p:sld>
+</file>
+
+<file path=ppt/slides/slide15.xml><?xml version="1.0" encoding="utf-8"?>
+<p:sld xmlns:a="http://schemas.openxmlformats.org/drawingml/2006/main" xmlns:p="http://schemas.openxmlformats.org/presentationml/2006/main" xmlns:r="http://schemas.openxmlformats.org/officeDocument/2006/relationships">
+  <p:cSld>
+    <p:bg>
+      <p:bgPr>
+        <a:solidFill>
+          <a:srgbClr val="FAFAF7"/>
+        </a:solidFill>
+        <a:effectLst/>
+      </p:bgPr>
+    </p:bg>
+    <p:spTree>
+      <p:nvGrpSpPr>
+        <p:cNvPr id="1" name=""/>
+        <p:cNvGrpSpPr/>
+        <p:nvPr/>
+      </p:nvGrpSpPr>
+      <p:grpSpPr/>
+      <p:sp>
+        <p:nvSpPr>
+          <p:cNvPr id="2" name="TextBox 1"/>
+          <p:cNvSpPr txBox="1"/>
+          <p:nvPr/>
+        </p:nvSpPr>
+        <p:spPr>
+          <a:xfrm>
+            <a:off x="731520" y="411480"/>
+            <a:ext cx="10698480" cy="1554480"/>
+          </a:xfrm>
+          <a:prstGeom prst="rect">
+            <a:avLst/>
+          </a:prstGeom>
+          <a:noFill/>
+        </p:spPr>
+        <p:txBody>
+          <a:bodyPr wrap="square">
+            <a:spAutoFit/>
+          </a:bodyPr>
+          <a:lstStyle/>
+          <a:p>
+            <a:r>
+              <a:rPr sz="1500" b="1">
+                <a:solidFill>
+                  <a:srgbClr val="0F6B5F"/>
+                </a:solidFill>
+                <a:latin typeface="Helvetica Neue"/>
+              </a:rPr>
+              <a:t>WHO BUILDS IT</a:t>
+            </a:r>
+          </a:p>
+          <a:p>
+            <a:r>
+              <a:rPr sz="3000" b="1">
+                <a:solidFill>
+                  <a:srgbClr val="1A1A2E"/>
+                </a:solidFill>
+                <a:latin typeface="Noto Sans Khmer"/>
+              </a:rPr>
+              <a:t>ក្រុមការងារ</a:t>
+            </a:r>
+          </a:p>
+          <a:p>
+            <a:r>
+              <a:rPr sz="3400" b="1">
+                <a:solidFill>
+                  <a:srgbClr val="C0212E"/>
+                </a:solidFill>
+                <a:latin typeface="Helvetica Neue"/>
+              </a:rPr>
+              <a:t>Team + One Open Question</a:t>
+            </a:r>
+          </a:p>
+        </p:txBody>
+      </p:sp>
+      <p:sp>
+        <p:nvSpPr>
+          <p:cNvPr id="3" name="Rectangle 2"/>
+          <p:cNvSpPr/>
+          <p:nvPr/>
+        </p:nvSpPr>
+        <p:spPr>
+          <a:xfrm>
+            <a:off x="777240" y="2084831"/>
+            <a:ext cx="1280160" cy="34925"/>
+          </a:xfrm>
+          <a:prstGeom prst="rect">
+            <a:avLst/>
+          </a:prstGeom>
+          <a:solidFill>
+            <a:srgbClr val="C0212E"/>
+          </a:solidFill>
+          <a:ln>
+            <a:noFill/>
+          </a:ln>
+          <a:effectLst/>
+        </p:spPr>
+        <p:style>
+          <a:lnRef idx="1">
+            <a:schemeClr val="accent1"/>
+          </a:lnRef>
+          <a:fillRef idx="3">
+            <a:schemeClr val="accent1"/>
+          </a:fillRef>
+          <a:effectRef idx="2">
+            <a:schemeClr val="accent1"/>
+          </a:effectRef>
+          <a:fontRef idx="minor">
+            <a:schemeClr val="lt1"/>
+          </a:fontRef>
+        </p:style>
+        <p:txBody>
+          <a:bodyPr rtlCol="0" anchor="ctr"/>
+          <a:lstStyle/>
+          <a:p>
+            <a:pPr algn="ctr"/>
+          </a:p>
+        </p:txBody>
+      </p:sp>
+      <p:sp>
+        <p:nvSpPr>
+          <p:cNvPr id="4" name="TextBox 3"/>
+          <p:cNvSpPr txBox="1"/>
+          <p:nvPr/>
+        </p:nvSpPr>
+        <p:spPr>
+          <a:xfrm>
             <a:off x="822960" y="2377440"/>
             <a:ext cx="10515600" cy="2651760"/>
           </a:xfrm>
@@ -6414,7 +7528,7 @@
                 </a:solidFill>
                 <a:latin typeface="Helvetica Neue"/>
               </a:rPr>
-              <a:t>LifeLink KH · Group 2 · Track B · Week 15 of 16 · Defense</a:t>
+              <a:t>LifeLink KH · Group 2 · Track B · Final Defense (Week 16)</a:t>
             </a:r>
           </a:p>
         </p:txBody>
@@ -6722,7 +7836,7 @@
                 </a:solidFill>
                 <a:latin typeface="Helvetica Neue"/>
               </a:rPr>
-              <a:t>LifeLink KH · Group 2 · Track B · Week 15 of 16 · Defense</a:t>
+              <a:t>LifeLink KH · Group 2 · Track B · Final Defense (Week 16)</a:t>
             </a:r>
           </a:p>
         </p:txBody>
@@ -7030,7 +8144,7 @@
                 </a:solidFill>
                 <a:latin typeface="Helvetica Neue"/>
               </a:rPr>
-              <a:t>LifeLink KH · Group 2 · Track B · Week 15 of 16 · Defense</a:t>
+              <a:t>LifeLink KH · Group 2 · Track B · Final Defense (Week 16)</a:t>
             </a:r>
           </a:p>
         </p:txBody>
@@ -7338,7 +8452,7 @@
                 </a:solidFill>
                 <a:latin typeface="Helvetica Neue"/>
               </a:rPr>
-              <a:t>LifeLink KH · Group 2 · Track B · Week 15 of 16 · Defense</a:t>
+              <a:t>LifeLink KH · Group 2 · Track B · Final Defense (Week 16)</a:t>
             </a:r>
           </a:p>
         </p:txBody>
@@ -7630,7 +8744,7 @@
                 </a:solidFill>
                 <a:latin typeface="Helvetica Neue"/>
               </a:rPr>
-              <a:t>LifeLink KH · Group 2 · Track B · Week 15 of 16 · Defense</a:t>
+              <a:t>LifeLink KH · Group 2 · Track B · Final Defense (Week 16)</a:t>
             </a:r>
           </a:p>
         </p:txBody>
@@ -8003,7 +9117,7 @@
                 </a:solidFill>
                 <a:latin typeface="Helvetica Neue"/>
               </a:rPr>
-              <a:t>LifeLink KH · Group 2 · Track B · Week 15 of 16 · Defense</a:t>
+              <a:t>LifeLink KH · Group 2 · Track B · Final Defense (Week 16)</a:t>
             </a:r>
           </a:p>
         </p:txBody>
@@ -8311,7 +9425,7 @@
                 </a:solidFill>
                 <a:latin typeface="Helvetica Neue"/>
               </a:rPr>
-              <a:t>LifeLink KH · Group 2 · Track B · Week 15 of 16 · Defense</a:t>
+              <a:t>LifeLink KH · Group 2 · Track B · Final Defense (Week 16)</a:t>
             </a:r>
           </a:p>
         </p:txBody>
@@ -8371,7 +9485,7 @@
                 </a:solidFill>
                 <a:latin typeface="Helvetica Neue"/>
               </a:rPr>
-              <a:t>DEMO</a:t>
+              <a:t>PROOF</a:t>
             </a:r>
           </a:p>
           <a:p>
@@ -8382,7 +9496,7 @@
                 </a:solidFill>
                 <a:latin typeface="Noto Sans Khmer"/>
               </a:rPr>
-              <a:t>ការបង្ហាញផ្ទាល់</a:t>
+              <a:t>អេក្រង់ក្នុងទូរស័ព្ទ</a:t>
             </a:r>
           </a:p>
           <a:p>
@@ -8393,7 +9507,7 @@
                 </a:solidFill>
                 <a:latin typeface="Helvetica Neue"/>
               </a:rPr>
-              <a:t>Live Walkthrough</a:t>
+              <a:t>The App, on a Phone</a:t>
             </a:r>
           </a:p>
         </p:txBody>
@@ -8442,16 +9556,112 @@
           </a:p>
         </p:txBody>
       </p:sp>
-      <p:sp>
-        <p:nvSpPr>
-          <p:cNvPr id="4" name="TextBox 3"/>
+      <p:pic>
+        <p:nvPicPr>
+          <p:cNvPr id="4" name="Picture 3" descr="mobile-intro-km.png"/>
+          <p:cNvPicPr>
+            <a:picLocks noChangeAspect="1"/>
+          </p:cNvPicPr>
+          <p:nvPr/>
+        </p:nvPicPr>
+        <p:blipFill>
+          <a:blip r:embed="rId2"/>
+          <a:stretch>
+            <a:fillRect/>
+          </a:stretch>
+        </p:blipFill>
+        <p:spPr>
+          <a:xfrm>
+            <a:off x="2804007" y="2395728"/>
+            <a:ext cx="1440180" cy="3200400"/>
+          </a:xfrm>
+          <a:prstGeom prst="rect">
+            <a:avLst/>
+          </a:prstGeom>
+        </p:spPr>
+      </p:pic>
+      <p:pic>
+        <p:nvPicPr>
+          <p:cNvPr id="5" name="Picture 4" descr="mobile-home-km.png"/>
+          <p:cNvPicPr>
+            <a:picLocks noChangeAspect="1"/>
+          </p:cNvPicPr>
+          <p:nvPr/>
+        </p:nvPicPr>
+        <p:blipFill>
+          <a:blip r:embed="rId3"/>
+          <a:stretch>
+            <a:fillRect/>
+          </a:stretch>
+        </p:blipFill>
+        <p:spPr>
+          <a:xfrm>
+            <a:off x="4518507" y="2395728"/>
+            <a:ext cx="1440180" cy="3200400"/>
+          </a:xfrm>
+          <a:prstGeom prst="rect">
+            <a:avLst/>
+          </a:prstGeom>
+        </p:spPr>
+      </p:pic>
+      <p:pic>
+        <p:nvPicPr>
+          <p:cNvPr id="6" name="Picture 5" descr="mobile-history-km.png"/>
+          <p:cNvPicPr>
+            <a:picLocks noChangeAspect="1"/>
+          </p:cNvPicPr>
+          <p:nvPr/>
+        </p:nvPicPr>
+        <p:blipFill>
+          <a:blip r:embed="rId4"/>
+          <a:stretch>
+            <a:fillRect/>
+          </a:stretch>
+        </p:blipFill>
+        <p:spPr>
+          <a:xfrm>
+            <a:off x="6233007" y="2395728"/>
+            <a:ext cx="1440180" cy="3200400"/>
+          </a:xfrm>
+          <a:prstGeom prst="rect">
+            <a:avLst/>
+          </a:prstGeom>
+        </p:spPr>
+      </p:pic>
+      <p:pic>
+        <p:nvPicPr>
+          <p:cNvPr id="7" name="Picture 6" descr="mobile-profile-km.png"/>
+          <p:cNvPicPr>
+            <a:picLocks noChangeAspect="1"/>
+          </p:cNvPicPr>
+          <p:nvPr/>
+        </p:nvPicPr>
+        <p:blipFill>
+          <a:blip r:embed="rId5"/>
+          <a:stretch>
+            <a:fillRect/>
+          </a:stretch>
+        </p:blipFill>
+        <p:spPr>
+          <a:xfrm>
+            <a:off x="7947507" y="2395728"/>
+            <a:ext cx="1440180" cy="3200400"/>
+          </a:xfrm>
+          <a:prstGeom prst="rect">
+            <a:avLst/>
+          </a:prstGeom>
+        </p:spPr>
+      </p:pic>
+      <p:sp>
+        <p:nvSpPr>
+          <p:cNvPr id="8" name="TextBox 7"/>
           <p:cNvSpPr txBox="1"/>
           <p:nvPr/>
         </p:nvSpPr>
         <p:spPr>
           <a:xfrm>
-            <a:off x="822960" y="2468880"/>
-            <a:ext cx="10515600" cy="3657600"/>
+            <a:off x="2804007" y="5669280"/>
+            <a:ext cx="1440180" cy="457200"/>
           </a:xfrm>
           <a:prstGeom prst="rect">
             <a:avLst/>
@@ -8464,160 +9674,127 @@
           </a:bodyPr>
           <a:lstStyle/>
           <a:p>
-            <a:pPr>
-              <a:spcAft>
-                <a:spcPts val="1400"/>
-              </a:spcAft>
-            </a:pPr>
-            <a:r>
-              <a:rPr sz="1900" b="1">
-                <a:solidFill>
-                  <a:srgbClr val="C0212E"/>
-                </a:solidFill>
-                <a:latin typeface="Helvetica Neue"/>
-              </a:rPr>
-              <a:t>▪  </a:t>
-            </a:r>
-            <a:r>
-              <a:rPr sz="1900" b="0">
-                <a:solidFill>
-                  <a:srgbClr val="1A1A2E"/>
-                </a:solidFill>
-                <a:latin typeface="Helvetica Neue"/>
-              </a:rPr>
-              <a:t>Two devices, one browser — donor, requester, hospital portal side by side</a:t>
-            </a:r>
-          </a:p>
-          <a:p>
-            <a:pPr>
-              <a:spcAft>
-                <a:spcPts val="1400"/>
-              </a:spcAft>
-            </a:pPr>
-            <a:r>
-              <a:rPr sz="1900" b="1">
-                <a:solidFill>
-                  <a:srgbClr val="C0212E"/>
-                </a:solidFill>
-                <a:latin typeface="Helvetica Neue"/>
-              </a:rPr>
-              <a:t>▪  </a:t>
-            </a:r>
-            <a:r>
-              <a:rPr sz="1900" b="0">
-                <a:solidFill>
-                  <a:srgbClr val="1A1A2E"/>
-                </a:solidFill>
-                <a:latin typeface="Helvetica Neue"/>
-              </a:rPr>
-              <a:t>Donor registers — Google Sign-in, blood type, district, no password</a:t>
-            </a:r>
-          </a:p>
-          <a:p>
-            <a:pPr>
-              <a:spcAft>
-                <a:spcPts val="1400"/>
-              </a:spcAft>
-            </a:pPr>
-            <a:r>
-              <a:rPr sz="1900" b="1">
-                <a:solidFill>
-                  <a:srgbClr val="C0212E"/>
-                </a:solidFill>
-                <a:latin typeface="Helvetica Neue"/>
-              </a:rPr>
-              <a:t>▪  </a:t>
-            </a:r>
-            <a:r>
-              <a:rPr sz="1900" b="0">
-                <a:solidFill>
-                  <a:srgbClr val="1A1A2E"/>
-                </a:solidFill>
-                <a:latin typeface="Helvetica Neue"/>
-              </a:rPr>
-              <a:t>Requester creates an urgent request — blood type, urgency, hospital</a:t>
-            </a:r>
-          </a:p>
-          <a:p>
-            <a:pPr>
-              <a:spcAft>
-                <a:spcPts val="1400"/>
-              </a:spcAft>
-            </a:pPr>
-            <a:r>
-              <a:rPr sz="1900" b="1">
-                <a:solidFill>
-                  <a:srgbClr val="C0212E"/>
-                </a:solidFill>
-                <a:latin typeface="Helvetica Neue"/>
-              </a:rPr>
-              <a:t>▪  </a:t>
-            </a:r>
-            <a:r>
-              <a:rPr sz="1900" b="0">
-                <a:solidFill>
-                  <a:srgbClr val="1A1A2E"/>
-                </a:solidFill>
-                <a:latin typeface="Helvetica Neue"/>
-              </a:rPr>
-              <a:t>Push notification fires — instant, targeted, not a Facebook scroll</a:t>
-            </a:r>
-          </a:p>
-          <a:p>
-            <a:pPr>
-              <a:spcAft>
-                <a:spcPts val="1400"/>
-              </a:spcAft>
-            </a:pPr>
-            <a:r>
-              <a:rPr sz="1900" b="1">
-                <a:solidFill>
-                  <a:srgbClr val="C0212E"/>
-                </a:solidFill>
-                <a:latin typeface="Helvetica Neue"/>
-              </a:rPr>
-              <a:t>▪  </a:t>
-            </a:r>
-            <a:r>
-              <a:rPr sz="1900" b="0">
-                <a:solidFill>
-                  <a:srgbClr val="1A1A2E"/>
-                </a:solidFill>
-                <a:latin typeface="Helvetica Neue"/>
-              </a:rPr>
-              <a:t>Donor accepts; hospital confirms on the portal — cooldown starts</a:t>
-            </a:r>
-          </a:p>
-          <a:p>
-            <a:pPr>
-              <a:spcAft>
-                <a:spcPts val="1400"/>
-              </a:spcAft>
-            </a:pPr>
-            <a:r>
-              <a:rPr sz="1900" b="1">
-                <a:solidFill>
-                  <a:srgbClr val="C0212E"/>
-                </a:solidFill>
-                <a:latin typeface="Helvetica Neue"/>
-              </a:rPr>
-              <a:t>▪  </a:t>
-            </a:r>
-            <a:r>
-              <a:rPr sz="1900" b="0">
-                <a:solidFill>
-                  <a:srgbClr val="1A1A2E"/>
-                </a:solidFill>
-                <a:latin typeface="Helvetica Neue"/>
-              </a:rPr>
-              <a:t>Full script: docs/po/demo-script.md — narration for every step</a:t>
-            </a:r>
-          </a:p>
-        </p:txBody>
-      </p:sp>
-      <p:sp>
-        <p:nvSpPr>
-          <p:cNvPr id="5" name="TextBox 4"/>
+            <a:pPr algn="ctr"/>
+            <a:r>
+              <a:rPr sz="1300" b="0">
+                <a:solidFill>
+                  <a:srgbClr val="5A5A6E"/>
+                </a:solidFill>
+                <a:latin typeface="Helvetica Neue"/>
+              </a:rPr>
+              <a:t>Intro — what the app is, before asking for an account</a:t>
+            </a:r>
+          </a:p>
+        </p:txBody>
+      </p:sp>
+      <p:sp>
+        <p:nvSpPr>
+          <p:cNvPr id="9" name="TextBox 8"/>
+          <p:cNvSpPr txBox="1"/>
+          <p:nvPr/>
+        </p:nvSpPr>
+        <p:spPr>
+          <a:xfrm>
+            <a:off x="4518507" y="5669280"/>
+            <a:ext cx="1440180" cy="457200"/>
+          </a:xfrm>
+          <a:prstGeom prst="rect">
+            <a:avLst/>
+          </a:prstGeom>
+          <a:noFill/>
+        </p:spPr>
+        <p:txBody>
+          <a:bodyPr wrap="square">
+            <a:spAutoFit/>
+          </a:bodyPr>
+          <a:lstStyle/>
+          <a:p>
+            <a:pPr algn="ctr"/>
+            <a:r>
+              <a:rPr sz="1300" b="0">
+                <a:solidFill>
+                  <a:srgbClr val="5A5A6E"/>
+                </a:solidFill>
+                <a:latin typeface="Helvetica Neue"/>
+              </a:rPr>
+              <a:t>Home — alerts for you, then who else needs blood</a:t>
+            </a:r>
+          </a:p>
+        </p:txBody>
+      </p:sp>
+      <p:sp>
+        <p:nvSpPr>
+          <p:cNvPr id="10" name="TextBox 9"/>
+          <p:cNvSpPr txBox="1"/>
+          <p:nvPr/>
+        </p:nvSpPr>
+        <p:spPr>
+          <a:xfrm>
+            <a:off x="6233007" y="5669280"/>
+            <a:ext cx="1440180" cy="457200"/>
+          </a:xfrm>
+          <a:prstGeom prst="rect">
+            <a:avLst/>
+          </a:prstGeom>
+          <a:noFill/>
+        </p:spPr>
+        <p:txBody>
+          <a:bodyPr wrap="square">
+            <a:spAutoFit/>
+          </a:bodyPr>
+          <a:lstStyle/>
+          <a:p>
+            <a:pPr algn="ctr"/>
+            <a:r>
+              <a:rPr sz="1300" b="0">
+                <a:solidFill>
+                  <a:srgbClr val="5A5A6E"/>
+                </a:solidFill>
+                <a:latin typeface="Helvetica Neue"/>
+              </a:rPr>
+              <a:t>History — what your donations added up to</a:t>
+            </a:r>
+          </a:p>
+        </p:txBody>
+      </p:sp>
+      <p:sp>
+        <p:nvSpPr>
+          <p:cNvPr id="11" name="TextBox 10"/>
+          <p:cNvSpPr txBox="1"/>
+          <p:nvPr/>
+        </p:nvSpPr>
+        <p:spPr>
+          <a:xfrm>
+            <a:off x="7947507" y="5669280"/>
+            <a:ext cx="1440180" cy="457200"/>
+          </a:xfrm>
+          <a:prstGeom prst="rect">
+            <a:avLst/>
+          </a:prstGeom>
+          <a:noFill/>
+        </p:spPr>
+        <p:txBody>
+          <a:bodyPr wrap="square">
+            <a:spAutoFit/>
+          </a:bodyPr>
+          <a:lstStyle/>
+          <a:p>
+            <a:pPr algn="ctr"/>
+            <a:r>
+              <a:rPr sz="1300" b="0">
+                <a:solidFill>
+                  <a:srgbClr val="5A5A6E"/>
+                </a:solidFill>
+                <a:latin typeface="Helvetica Neue"/>
+              </a:rPr>
+              <a:t>Profile — blood type, district, eligibility</a:t>
+            </a:r>
+          </a:p>
+        </p:txBody>
+      </p:sp>
+      <p:sp>
+        <p:nvSpPr>
+          <p:cNvPr id="12" name="TextBox 11"/>
           <p:cNvSpPr txBox="1"/>
           <p:nvPr/>
         </p:nvSpPr>
@@ -8644,7 +9821,7 @@
                 </a:solidFill>
                 <a:latin typeface="Helvetica Neue"/>
               </a:rPr>
-              <a:t>LifeLink KH · Group 2 · Track B · Week 15 of 16 · Defense</a:t>
+              <a:t>LifeLink KH · Group 2 · Track B · Final Defense (Week 16)</a:t>
             </a:r>
           </a:p>
         </p:txBody>
@@ -8704,7 +9881,7 @@
                 </a:solidFill>
                 <a:latin typeface="Helvetica Neue"/>
               </a:rPr>
-              <a:t>WHEN</a:t>
+              <a:t>PROOF</a:t>
             </a:r>
           </a:p>
           <a:p>
@@ -8715,7 +9892,7 @@
                 </a:solidFill>
                 <a:latin typeface="Noto Sans Khmer"/>
               </a:rPr>
-              <a:t>ដំណាក់កាលការងារ</a:t>
+              <a:t>អេក្រង់ក្នុងកុំព្យូទ័រ</a:t>
             </a:r>
           </a:p>
           <a:p>
@@ -8726,7 +9903,7 @@
                 </a:solidFill>
                 <a:latin typeface="Helvetica Neue"/>
               </a:rPr>
-              <a:t>Milestones · M1 → M7</a:t>
+              <a:t>The Portal, in a Browser</a:t>
             </a:r>
           </a:p>
         </p:txBody>
@@ -8775,16 +9952,64 @@
           </a:p>
         </p:txBody>
       </p:sp>
-      <p:sp>
-        <p:nvSpPr>
-          <p:cNvPr id="4" name="TextBox 3"/>
+      <p:pic>
+        <p:nvPicPr>
+          <p:cNvPr id="4" name="Picture 3" descr="board-public-km.png"/>
+          <p:cNvPicPr>
+            <a:picLocks noChangeAspect="1"/>
+          </p:cNvPicPr>
+          <p:nvPr/>
+        </p:nvPicPr>
+        <p:blipFill>
+          <a:blip r:embed="rId2"/>
+          <a:stretch>
+            <a:fillRect/>
+          </a:stretch>
+        </p:blipFill>
+        <p:spPr>
+          <a:xfrm>
+            <a:off x="800124" y="2395728"/>
+            <a:ext cx="5781702" cy="2834640"/>
+          </a:xfrm>
+          <a:prstGeom prst="rect">
+            <a:avLst/>
+          </a:prstGeom>
+        </p:spPr>
+      </p:pic>
+      <p:pic>
+        <p:nvPicPr>
+          <p:cNvPr id="5" name="Picture 4" descr="portal-staff-km.png"/>
+          <p:cNvPicPr>
+            <a:picLocks noChangeAspect="1"/>
+          </p:cNvPicPr>
+          <p:nvPr/>
+        </p:nvPicPr>
+        <p:blipFill>
+          <a:blip r:embed="rId3"/>
+          <a:stretch>
+            <a:fillRect/>
+          </a:stretch>
+        </p:blipFill>
+        <p:spPr>
+          <a:xfrm>
+            <a:off x="6856146" y="2395728"/>
+            <a:ext cx="4535424" cy="2834640"/>
+          </a:xfrm>
+          <a:prstGeom prst="rect">
+            <a:avLst/>
+          </a:prstGeom>
+        </p:spPr>
+      </p:pic>
+      <p:sp>
+        <p:nvSpPr>
+          <p:cNvPr id="6" name="TextBox 5"/>
           <p:cNvSpPr txBox="1"/>
           <p:nvPr/>
         </p:nvSpPr>
         <p:spPr>
           <a:xfrm>
-            <a:off x="822960" y="2331720"/>
-            <a:ext cx="10607040" cy="3749039"/>
+            <a:off x="800124" y="5303520"/>
+            <a:ext cx="5781702" cy="457200"/>
           </a:xfrm>
           <a:prstGeom prst="rect">
             <a:avLst/>
@@ -8797,248 +10022,57 @@
           </a:bodyPr>
           <a:lstStyle/>
           <a:p>
-            <a:pPr>
-              <a:spcAft>
-                <a:spcPts val="900"/>
-              </a:spcAft>
-            </a:pPr>
-            <a:r>
-              <a:rPr sz="1700" b="1">
-                <a:solidFill>
-                  <a:srgbClr val="0F6B5F"/>
-                </a:solidFill>
-                <a:latin typeface="Helvetica Neue"/>
-              </a:rPr>
-              <a:t>M1  </a:t>
-            </a:r>
-            <a:r>
-              <a:rPr sz="1500" b="0">
+            <a:pPr algn="ctr"/>
+            <a:r>
+              <a:rPr sz="1300" b="0">
                 <a:solidFill>
                   <a:srgbClr val="5A5A6E"/>
                 </a:solidFill>
                 <a:latin typeface="Helvetica Neue"/>
               </a:rPr>
-              <a:t>W3-4      </a:t>
-            </a:r>
-            <a:r>
-              <a:rPr sz="1500" b="0">
-                <a:solidFill>
-                  <a:srgbClr val="1A1A2E"/>
-                </a:solidFill>
-                <a:latin typeface="Helvetica Neue"/>
-              </a:rPr>
-              <a:t>ERD (done), wireframes for the 4 core screens only, API spec for the 8 core FRs</a:t>
-            </a:r>
-          </a:p>
-          <a:p>
-            <a:pPr>
-              <a:spcAft>
-                <a:spcPts val="900"/>
-              </a:spcAft>
-            </a:pPr>
-            <a:r>
-              <a:rPr sz="1700" b="1">
-                <a:solidFill>
-                  <a:srgbClr val="0F6B5F"/>
-                </a:solidFill>
-                <a:latin typeface="Helvetica Neue"/>
-              </a:rPr>
-              <a:t>M2  </a:t>
-            </a:r>
-            <a:r>
-              <a:rPr sz="1500" b="0">
+              <a:t>Public board — open requests, no account needed</a:t>
+            </a:r>
+          </a:p>
+        </p:txBody>
+      </p:sp>
+      <p:sp>
+        <p:nvSpPr>
+          <p:cNvPr id="7" name="TextBox 6"/>
+          <p:cNvSpPr txBox="1"/>
+          <p:nvPr/>
+        </p:nvSpPr>
+        <p:spPr>
+          <a:xfrm>
+            <a:off x="6856146" y="5303520"/>
+            <a:ext cx="4535424" cy="457200"/>
+          </a:xfrm>
+          <a:prstGeom prst="rect">
+            <a:avLst/>
+          </a:prstGeom>
+          <a:noFill/>
+        </p:spPr>
+        <p:txBody>
+          <a:bodyPr wrap="square">
+            <a:spAutoFit/>
+          </a:bodyPr>
+          <a:lstStyle/>
+          <a:p>
+            <a:pPr algn="ctr"/>
+            <a:r>
+              <a:rPr sz="1300" b="0">
                 <a:solidFill>
                   <a:srgbClr val="5A5A6E"/>
                 </a:solidFill>
                 <a:latin typeface="Helvetica Neue"/>
               </a:rPr>
-              <a:t>W5-6      </a:t>
-            </a:r>
-            <a:r>
-              <a:rPr sz="1500" b="0">
-                <a:solidFill>
-                  <a:srgbClr val="1A1A2E"/>
-                </a:solidFill>
-                <a:latin typeface="Helvetica Neue"/>
-              </a:rPr>
-              <a:t>Spring Boot init (PostgreSQL, Flyway), Flutter + Next.js init, docker-compose up runs backend…</a:t>
-            </a:r>
-          </a:p>
-          <a:p>
-            <a:pPr>
-              <a:spcAft>
-                <a:spcPts val="900"/>
-              </a:spcAft>
-            </a:pPr>
-            <a:r>
-              <a:rPr sz="1700" b="1">
-                <a:solidFill>
-                  <a:srgbClr val="0F6B5F"/>
-                </a:solidFill>
-                <a:latin typeface="Helvetica Neue"/>
-              </a:rPr>
-              <a:t>M3  </a:t>
-            </a:r>
-            <a:r>
-              <a:rPr sz="1500" b="0">
-                <a:solidFill>
-                  <a:srgbClr val="5A5A6E"/>
-                </a:solidFill>
-                <a:latin typeface="Helvetica Neue"/>
-              </a:rPr>
-              <a:t>W7-9      </a:t>
-            </a:r>
-            <a:r>
-              <a:rPr sz="1500" b="0">
-                <a:solidFill>
-                  <a:srgbClr val="1A1A2E"/>
-                </a:solidFill>
-                <a:latin typeface="Helvetica Neue"/>
-              </a:rPr>
-              <a:t>Google Sign-In + donor register + FCM token registration end-to-end (feature 1)</a:t>
-            </a:r>
-          </a:p>
-          <a:p>
-            <a:pPr>
-              <a:spcAft>
-                <a:spcPts val="900"/>
-              </a:spcAft>
-            </a:pPr>
-            <a:r>
-              <a:rPr sz="1700" b="1">
-                <a:solidFill>
-                  <a:srgbClr val="0F6B5F"/>
-                </a:solidFill>
-                <a:latin typeface="Helvetica Neue"/>
-              </a:rPr>
-              <a:t>M4  </a:t>
-            </a:r>
-            <a:r>
-              <a:rPr sz="1500" b="0">
-                <a:solidFill>
-                  <a:srgbClr val="5A5A6E"/>
-                </a:solidFill>
-                <a:latin typeface="Helvetica Neue"/>
-              </a:rPr>
-              <a:t>W10-12    </a:t>
-            </a:r>
-            <a:r>
-              <a:rPr sz="1500" b="0">
-                <a:solidFill>
-                  <a:srgbClr val="1A1A2E"/>
-                </a:solidFill>
-                <a:latin typeface="Helvetica Neue"/>
-              </a:rPr>
-              <a:t>Request create + ABO/Rh and distance matching + eligibility computation + request-alert push…</a:t>
-            </a:r>
-          </a:p>
-          <a:p>
-            <a:pPr>
-              <a:spcAft>
-                <a:spcPts val="900"/>
-              </a:spcAft>
-            </a:pPr>
-            <a:r>
-              <a:rPr sz="1700" b="1">
-                <a:solidFill>
-                  <a:srgbClr val="0F6B5F"/>
-                </a:solidFill>
-                <a:latin typeface="Helvetica Neue"/>
-              </a:rPr>
-              <a:t>M5  </a:t>
-            </a:r>
-            <a:r>
-              <a:rPr sz="1500" b="0">
-                <a:solidFill>
-                  <a:srgbClr val="5A5A6E"/>
-                </a:solidFill>
-                <a:latin typeface="Helvetica Neue"/>
-              </a:rPr>
-              <a:t>W13       </a:t>
-            </a:r>
-            <a:r>
-              <a:rPr sz="1500" b="0">
-                <a:solidFill>
-                  <a:srgbClr val="1A1A2E"/>
-                </a:solidFill>
-                <a:latin typeface="Helvetica Neue"/>
-              </a:rPr>
-              <a:t>Donation history list + 56-day eligibility status + the single hospital web page (feature 3)</a:t>
-            </a:r>
-          </a:p>
-          <a:p>
-            <a:pPr>
-              <a:spcAft>
-                <a:spcPts val="900"/>
-              </a:spcAft>
-            </a:pPr>
-            <a:r>
-              <a:rPr sz="1700" b="1">
-                <a:solidFill>
-                  <a:srgbClr val="0F6B5F"/>
-                </a:solidFill>
-                <a:latin typeface="Helvetica Neue"/>
-              </a:rPr>
-              <a:t>M6  </a:t>
-            </a:r>
-            <a:r>
-              <a:rPr sz="1500" b="0">
-                <a:solidFill>
-                  <a:srgbClr val="5A5A6E"/>
-                </a:solidFill>
-                <a:latin typeface="Helvetica Neue"/>
-              </a:rPr>
-              <a:t>W14       </a:t>
-            </a:r>
-            <a:r>
-              <a:rPr sz="1500" b="0">
-                <a:solidFill>
-                  <a:srgbClr val="1A1A2E"/>
-                </a:solidFill>
-                <a:latin typeface="Helvetica Neue"/>
-              </a:rPr>
-              <a:t>GPS via geolocator, Khmer/English i18n, Android build, iOS build (device/simulator only, DEC-…</a:t>
-            </a:r>
-          </a:p>
-          <a:p>
-            <a:pPr>
-              <a:spcAft>
-                <a:spcPts val="900"/>
-              </a:spcAft>
-            </a:pPr>
-            <a:r>
-              <a:rPr sz="1700" b="1">
-                <a:solidFill>
-                  <a:srgbClr val="C0212E"/>
-                </a:solidFill>
-                <a:latin typeface="Helvetica Neue"/>
-              </a:rPr>
-              <a:t>M7  </a:t>
-            </a:r>
-            <a:r>
-              <a:rPr sz="1500" b="0">
-                <a:solidFill>
-                  <a:srgbClr val="5A5A6E"/>
-                </a:solidFill>
-                <a:latin typeface="Helvetica Neue"/>
-              </a:rPr>
-              <a:t>W15       </a:t>
-            </a:r>
-            <a:r>
-              <a:rPr sz="1500" b="1">
-                <a:solidFill>
-                  <a:srgbClr val="1A1A2E"/>
-                </a:solidFill>
-                <a:latin typeface="Helvetica Neue"/>
-              </a:rPr>
-              <a:t>Test pass, signed AAB, Flutter app published to Play Store internal testing</a:t>
-            </a:r>
-          </a:p>
-        </p:txBody>
-      </p:sp>
-      <p:sp>
-        <p:nvSpPr>
-          <p:cNvPr id="5" name="TextBox 4"/>
+              <a:t>The same board, signed in as hospital staff</a:t>
+            </a:r>
+          </a:p>
+        </p:txBody>
+      </p:sp>
+      <p:sp>
+        <p:nvSpPr>
+          <p:cNvPr id="8" name="TextBox 7"/>
           <p:cNvSpPr txBox="1"/>
           <p:nvPr/>
         </p:nvSpPr>
@@ -9065,7 +10099,7 @@
                 </a:solidFill>
                 <a:latin typeface="Helvetica Neue"/>
               </a:rPr>
-              <a:t>Parsed from CLAUDE.md section 4 — the single source for milestone dates</a:t>
+              <a:t>LifeLink KH · Group 2 · Track B · Final Defense (Week 16)</a:t>
             </a:r>
           </a:p>
         </p:txBody>

--- a/docs/po/presentations/LifeLinkKH-v2.pptx
+++ b/docs/po/presentations/LifeLinkKH-v2.pptx
@@ -940,22 +940,63 @@
           <a:p/>
           <a:p>
             <a:r>
-              <a:t>M7's remaining steps are execution, not design: generate the upload keystore</a:t>
-            </a:r>
-          </a:p>
-          <a:p>
-            <a:r>
-              <a:t>(docs/tech-lead/deploy-runbook.md), build the signed AAB, upload to Play Console's internal</a:t>
-            </a:r>
-          </a:p>
-          <a:p>
-            <a:r>
-              <a:t>testing track. Backend during the testing window is a tunneled laptop, not a hosted deploy</a:t>
-            </a:r>
-          </a:p>
-          <a:p>
-            <a:r>
-              <a:t>— DEC-007, and the risks slide carries it openly.</a:t>
+              <a:t>On the last bullet, if asked: the demo you just watched runs entirely on one laptop —</a:t>
+            </a:r>
+          </a:p>
+          <a:p>
+            <a:r>
+              <a:t>compose for backend, database and portal, the app on an emulator or a tethered phone. The</a:t>
+            </a:r>
+          </a:p>
+          <a:p>
+            <a:r>
+              <a:t>signed AAB and the Play Store internal-testing upload are written up end to end in</a:t>
+            </a:r>
+          </a:p>
+          <a:p>
+            <a:r>
+              <a:t>docs/tech-lead/deploy-runbook.md and sequenced AFTER the demo, deliberately (DEC-012). A</a:t>
+            </a:r>
+          </a:p>
+          <a:p>
+            <a:r>
+              <a:t>store upload changes nothing about what this room sees; what it adds is a distribution</a:t>
+            </a:r>
+          </a:p>
+          <a:p>
+            <a:r>
+              <a:t>channel, and Play Console identity verification plus review latency is days of waiting</a:t>
+            </a:r>
+          </a:p>
+          <a:p>
+            <a:r>
+              <a:t>outside our control. Behind the demo, its worst case is a late release. In front of it, its</a:t>
+            </a:r>
+          </a:p>
+          <a:p>
+            <a:r>
+              <a:t>worst case is a missed defense.</a:t>
+            </a:r>
+          </a:p>
+          <a:p/>
+          <a:p>
+            <a:r>
+              <a:t>Say the cost of that choice in the same breath, do not let it be found: if M7's clause is</a:t>
+            </a:r>
+          </a:p>
+          <a:p>
+            <a:r>
+              <a:t>graded literally as a store release, this leaves a graded milestone open today. The runbook</a:t>
+            </a:r>
+          </a:p>
+          <a:p>
+            <a:r>
+              <a:t>is written, the account is being opened, and executing it is about a day once the demo is</a:t>
+            </a:r>
+          </a:p>
+          <a:p>
+            <a:r>
+              <a:t>behind us.</a:t>
             </a:r>
           </a:p>
           <a:p/>
@@ -6492,7 +6533,7 @@
                 </a:solidFill>
                 <a:latin typeface="Helvetica Neue"/>
               </a:rPr>
-              <a:t>M7 remains: signed AAB and Play Console internal-testing upload</a:t>
+              <a:t>Demo runs on one local machine — store release sequenced after it</a:t>
             </a:r>
           </a:p>
         </p:txBody>

--- a/docs/po/presentations/LifeLinkKH-v2.pptx
+++ b/docs/po/presentations/LifeLinkKH-v2.pptx
@@ -649,7 +649,7 @@
           </a:p>
           <a:p>
             <a:r>
-              <a:t>recording from docs/po/demo-script.md section 7, which is the checklist for the day</a:t>
+              <a:t>recording from docs/po/demo-script.md section 8, which is the checklist for the day</a:t>
             </a:r>
           </a:p>
           <a:p>
@@ -1110,22 +1110,64 @@
           </a:p>
           <a:p>
             <a:r>
-              <a:t>ANSWER: With SQL COUNT queries against the pilot database at demo time. We originally planned</a:t>
-            </a:r>
-          </a:p>
-          <a:p>
-            <a:r>
-              <a:t>event-capture instrumentation on every milestone and cut it — for a pilot this size the</a:t>
-            </a:r>
-          </a:p>
-          <a:p>
-            <a:r>
-              <a:t>queries give the same five numbers for none of the build cost. Be honest about the limit: if</a:t>
-            </a:r>
-          </a:p>
-          <a:p>
-            <a:r>
-              <a:t>pilot data is thin, these stay targets rather than results.</a:t>
+              <a:t>ANSWER: scripts/metrics.sql — it produces all five off the live database in one run, and it</a:t>
+            </a:r>
+          </a:p>
+          <a:p>
+            <a:r>
+              <a:t>can be run in front of the room. We originally planned event-capture instrumentation on every</a:t>
+            </a:r>
+          </a:p>
+          <a:p>
+            <a:r>
+              <a:t>milestone and cut it (DEC-003 withdrawn by DEC-004); for a pilot this size the queries give</a:t>
+            </a:r>
+          </a:p>
+          <a:p>
+            <a:r>
+              <a:t>the same five numbers for none of the build cost.</a:t>
+            </a:r>
+          </a:p>
+          <a:p/>
+          <a:p>
+            <a:r>
+              <a:t>Be honest about the limit, in the same breath: the query is real, the pilot data is not. Every</a:t>
+            </a:r>
+          </a:p>
+          <a:p>
+            <a:r>
+              <a:t>row today is a team-created test account. The output carries a `sample` column next to every</a:t>
+            </a:r>
+          </a:p>
+          <a:p>
+            <a:r>
+              <a:t>percentage for exactly that reason — quote the denominator out loud, never the percentage</a:t>
+            </a:r>
+          </a:p>
+          <a:p>
+            <a:r>
+              <a:t>alone. Two of three requests accepted inside an hour is 67% and it proves nothing.</a:t>
+            </a:r>
+          </a:p>
+          <a:p/>
+          <a:p>
+            <a:r>
+              <a:t>Metric 5 is the one to be careful with: notified_at is set when Firebase ACCEPTS the send, not</a:t>
+            </a:r>
+          </a:p>
+          <a:p>
+            <a:r>
+              <a:t>when a phone displays it. Call it send-success, not delivery, and say true delivery lives in</a:t>
+            </a:r>
+          </a:p>
+          <a:p>
+            <a:r>
+              <a:t>Firebase's own reporting. Being precise here costs nothing and being caught overstating it</a:t>
+            </a:r>
+          </a:p>
+          <a:p>
+            <a:r>
+              <a:t>costs the whole slide.</a:t>
             </a:r>
           </a:p>
         </p:txBody>

--- a/docs/po/presentations/LifeLinkKH-v2.pptx
+++ b/docs/po/presentations/LifeLinkKH-v2.pptx
@@ -852,32 +852,27 @@
           <a:lstStyle/>
           <a:p>
             <a:r>
-              <a:t>Test counts are re-run before every rebuild of this deck, not copied forward — the previous</a:t>
-            </a:r>
-          </a:p>
-          <a:p>
-            <a:r>
-              <a:t>version of this slide said 138 backend tests, which was true in August and is not now (184).</a:t>
-            </a:r>
-          </a:p>
-          <a:p>
-            <a:r>
-              <a:t>Both numbers come from a full unpiped run on 2026-09-23: `./mvnw test` with Docker up</a:t>
-            </a:r>
-          </a:p>
-          <a:p>
-            <a:r>
-              <a:t>(184 passed, 0 skipped — the Testcontainers integration tests silently skip when Docker is</a:t>
-            </a:r>
-          </a:p>
-          <a:p>
-            <a:r>
-              <a:t>down, so "0 skipped" is the number that matters, not "BUILD SUCCESS") and `flutter test`</a:t>
-            </a:r>
-          </a:p>
-          <a:p>
-            <a:r>
-              <a:t>(189 passed).</a:t>
+              <a:t>Test counts are re-run before every rebuild of this deck, not copied forward — this slide has</a:t>
+            </a:r>
+          </a:p>
+          <a:p>
+            <a:r>
+              <a:t>said 138 and then 184 on the way to today's 196, each one true when it was written. Both</a:t>
+            </a:r>
+          </a:p>
+          <a:p>
+            <a:r>
+              <a:t>numbers come from a full unpiped run on 2026-09-23: `./mvnw test` with Docker up (196 passed,</a:t>
+            </a:r>
+          </a:p>
+          <a:p>
+            <a:r>
+              <a:t>0 skipped — the Testcontainers integration tests silently skip when Docker is down, so "0</a:t>
+            </a:r>
+          </a:p>
+          <a:p>
+            <a:r>
+              <a:t>skipped" is the number that matters, not "BUILD SUCCESS") and `flutter test` (189 passed).</a:t>
             </a:r>
           </a:p>
           <a:p/>
@@ -1284,47 +1279,63 @@
           <a:p/>
           <a:p>
             <a:r>
-              <a:t>On the two security bullets, both dated the same way in docs/scope.md — fix before any real</a:t>
-            </a:r>
-          </a:p>
-          <a:p>
-            <a:r>
-              <a:t>donor's data is in this database, which is also FR-SECURITY-001's trigger. The seeded portal</a:t>
-            </a:r>
-          </a:p>
-          <a:p>
-            <a:r>
-              <a:t>password is in migrations V13-V16 and since V16 all four portal accounts share one value;</a:t>
-            </a:r>
-          </a:p>
-          <a:p>
-            <a:r>
-              <a:t>demo-runbook.md section 9 rotates it, and it must be rotated before this is demoed from a</a:t>
-            </a:r>
-          </a:p>
-          <a:p>
-            <a:r>
-              <a:t>projector. The public board publishes a named donor's blood type and district to anyone with</a:t>
-            </a:r>
-          </a:p>
-          <a:p>
-            <a:r>
-              <a:t>the link (DEC-009) — safe only because every donor row today is a team-created test account,</a:t>
-            </a:r>
-          </a:p>
-          <a:p>
-            <a:r>
-              <a:t>and there is no consent step because until that day there was nothing to consent to. Say both</a:t>
-            </a:r>
-          </a:p>
-          <a:p>
-            <a:r>
-              <a:t>out loud rather than waiting to be asked: each is a recorded choice with a recorded expiry,</a:t>
-            </a:r>
-          </a:p>
-          <a:p>
-            <a:r>
-              <a:t>which is a different thing from an oversight found at the defense.</a:t>
+              <a:t>On the two security bullets. The bigger one closed on 23 September and is worth saying out</a:t>
+            </a:r>
+          </a:p>
+          <a:p>
+            <a:r>
+              <a:t>loud as a closed item rather than leaving off the slide: until that day a password committed in</a:t>
+            </a:r>
+          </a:p>
+          <a:p>
+            <a:r>
+              <a:t>migrations V13-V16 opened all four portal accounts, including the ADMIN. V19 replaced those</a:t>
+            </a:r>
+          </a:p>
+          <a:p>
+            <a:r>
+              <a:t>digests with hashes of random values nobody holds, and the real passwords now come from the</a:t>
+            </a:r>
+          </a:p>
+          <a:p>
+            <a:r>
+              <a:t>environment at startup (DEC-013). What is left is narrower and is what the bullet says: one</a:t>
+            </a:r>
+          </a:p>
+          <a:p>
+            <a:r>
+              <a:t>environment value covers three hospital accounts, so three people share a credential. Each row</a:t>
+            </a:r>
+          </a:p>
+          <a:p>
+            <a:r>
+              <a:t>still carries its own salt, so cracking one does not open the others.</a:t>
+            </a:r>
+          </a:p>
+          <a:p/>
+          <a:p>
+            <a:r>
+              <a:t>The public board publishes a named donor's blood type and district to anyone with the link</a:t>
+            </a:r>
+          </a:p>
+          <a:p>
+            <a:r>
+              <a:t>(DEC-009) — safe only because every donor row today is a team-created test account, and there</a:t>
+            </a:r>
+          </a:p>
+          <a:p>
+            <a:r>
+              <a:t>is no consent step because until that day there was nothing to consent to. Say it rather than</a:t>
+            </a:r>
+          </a:p>
+          <a:p>
+            <a:r>
+              <a:t>waiting to be asked: a recorded choice with a recorded expiry is a different thing from an</a:t>
+            </a:r>
+          </a:p>
+          <a:p>
+            <a:r>
+              <a:t>oversight found at the defense.</a:t>
             </a:r>
           </a:p>
           <a:p/>
@@ -6500,7 +6511,7 @@
                 </a:solidFill>
                 <a:latin typeface="Helvetica Neue"/>
               </a:rPr>
-              <a:t>Backend: 184 tests green against real PostgreSQL via Testcontainers</a:t>
+              <a:t>Backend: 196 tests green against real PostgreSQL via Testcontainers</a:t>
             </a:r>
           </a:p>
           <a:p>
@@ -7191,7 +7202,7 @@
                 </a:solidFill>
                 <a:latin typeface="Helvetica Neue"/>
               </a:rPr>
-              <a:t>Seeded portal password sits in the repository — rotate before real data</a:t>
+              <a:t>Three hospital staff accounts share one password — one credential, three people</a:t>
             </a:r>
           </a:p>
           <a:p>

--- a/docs/po/presentations/LifeLinkKH-v2.pptx
+++ b/docs/po/presentations/LifeLinkKH-v2.pptx
@@ -516,6 +516,22 @@
           <a:lstStyle/>
           <a:p>
             <a:r>
+              <a:t>30 seconds here. The clock for the whole talk — 30 minutes of slides with a 5-minute demo</a:t>
+            </a:r>
+          </a:p>
+          <a:p>
+            <a:r>
+              <a:t>sitting inside it at 16:00 — is docs/po/presentations/run-of-show.md, along with what to cut</a:t>
+            </a:r>
+          </a:p>
+          <a:p>
+            <a:r>
+              <a:t>first if the slot turns out to include the demo rather than sit beside it.</a:t>
+            </a:r>
+          </a:p>
+          <a:p/>
+          <a:p>
+            <a:r>
               <a:t>Open with the problem, not the product. One line: "Right now, when a Cambodian hospital</a:t>
             </a:r>
           </a:p>
@@ -608,6 +624,37 @@
           <a:p>
             <a:r>
               <a:t>"Rather than describe it, let me show it" — then tab away from the deck.</a:t>
+            </a:r>
+          </a:p>
+          <a:p/>
+          <a:p>
+            <a:r>
+              <a:t>Five minutes, and it does not fit the six-step golden path, so the donor is PRE-STAGED:</a:t>
+            </a:r>
+          </a:p>
+          <a:p>
+            <a:r>
+              <a:t>registered, signed in, permission granted, sitting on Home before the room walks in. The two</a:t>
+            </a:r>
+          </a:p>
+          <a:p>
+            <a:r>
+              <a:t>screenshot slides you just showed are what registration looks like — that is why they come</a:t>
+            </a:r>
+          </a:p>
+          <a:p>
+            <a:r>
+              <a:t>immediately before this one. The demo then runs post → push → accept → confirm → history, with</a:t>
+            </a:r>
+          </a:p>
+          <a:p>
+            <a:r>
+              <a:t>the beats and the wording in run-of-show.md. Rehearse it to 4:30; the spare 30 seconds is where</a:t>
+            </a:r>
+          </a:p>
+          <a:p>
+            <a:r>
+              <a:t>a slow emulator goes.</a:t>
             </a:r>
           </a:p>
           <a:p/>

--- a/docs/po/presentations/LifeLinkKH-v2.pptx
+++ b/docs/po/presentations/LifeLinkKH-v2.pptx
@@ -644,7 +644,12 @@
           </a:p>
           <a:p>
             <a:r>
-              <a:t>immediately before this one. The demo then runs post → push → accept → confirm → history, with</a:t>
+              <a:t>immediately before this one. The demo then runs post → push → accept → push back → confirm →</a:t>
+            </a:r>
+          </a:p>
+          <a:p>
+            <a:r>
+              <a:t>history, with</a:t>
             </a:r>
           </a:p>
           <a:p>
@@ -904,22 +909,27 @@
           </a:p>
           <a:p>
             <a:r>
-              <a:t>said 138 and then 184 on the way to today's 196, each one true when it was written. Both</a:t>
-            </a:r>
-          </a:p>
-          <a:p>
-            <a:r>
-              <a:t>numbers come from a full unpiped run on 2026-09-23: `./mvnw test` with Docker up (196 passed,</a:t>
-            </a:r>
-          </a:p>
-          <a:p>
-            <a:r>
-              <a:t>0 skipped — the Testcontainers integration tests silently skip when Docker is down, so "0</a:t>
-            </a:r>
-          </a:p>
-          <a:p>
-            <a:r>
-              <a:t>skipped" is the number that matters, not "BUILD SUCCESS") and `flutter test` (189 passed).</a:t>
+              <a:t>said 138, 184 and 196 on the way to today's 201, each one true when it was written. Both</a:t>
+            </a:r>
+          </a:p>
+          <a:p>
+            <a:r>
+              <a:t>numbers come from full runs on 2026-09-25: `./mvnw verify` with Docker up (201 passed, 0</a:t>
+            </a:r>
+          </a:p>
+          <a:p>
+            <a:r>
+              <a:t>skipped — the Testcontainers integration tests silently skip when Docker is down, so "0</a:t>
+            </a:r>
+          </a:p>
+          <a:p>
+            <a:r>
+              <a:t>skipped" is the number that matters, not "BUILD SUCCESS") and `flutter test` (201 passed).</a:t>
+            </a:r>
+          </a:p>
+          <a:p>
+            <a:r>
+              <a:t>That the two are equal is a coincidence, not a typo.</a:t>
             </a:r>
           </a:p>
           <a:p/>
@@ -946,7 +956,17 @@
           <a:p/>
           <a:p>
             <a:r>
-              <a:t>The fourth bullet is work that grew AFTER the graded milestones, in September: the public</a:t>
+              <a:t>The fourth bullet is work that grew AFTER the graded milestones, in September. Newest first:</a:t>
+            </a:r>
+          </a:p>
+          <a:p>
+            <a:r>
+              <a:t>two-way push (FR-NOTIFY-003, 2026-09-25) — the family who posted is now told when a donor</a:t>
+            </a:r>
+          </a:p>
+          <a:p>
+            <a:r>
+              <a:t>accepts; until then push went to donors only and the requester waited in silence. Then the public</a:t>
             </a:r>
           </a:p>
           <a:p>
@@ -5804,7 +5824,7 @@
                 </a:solidFill>
                 <a:latin typeface="Helvetica Neue"/>
               </a:rPr>
-              <a:t>Donor registers — Google Sign-in, blood type, district, no password</a:t>
+              <a:t>Requester creates an urgent request — blood type, urgency, hospital</a:t>
             </a:r>
           </a:p>
           <a:p>
@@ -5829,7 +5849,7 @@
                 </a:solidFill>
                 <a:latin typeface="Helvetica Neue"/>
               </a:rPr>
-              <a:t>Requester creates an urgent request — blood type, urgency, hospital</a:t>
+              <a:t>Push notification fires — instant, targeted, not a Facebook scroll</a:t>
             </a:r>
           </a:p>
           <a:p>
@@ -5854,7 +5874,7 @@
                 </a:solidFill>
                 <a:latin typeface="Helvetica Neue"/>
               </a:rPr>
-              <a:t>Push notification fires — instant, targeted, not a Facebook scroll</a:t>
+              <a:t>Donor accepts — and the family's phone is told a donor is coming</a:t>
             </a:r>
           </a:p>
           <a:p>
@@ -5879,7 +5899,7 @@
                 </a:solidFill>
                 <a:latin typeface="Helvetica Neue"/>
               </a:rPr>
-              <a:t>Donor accepts; hospital confirms on the portal — cooldown starts</a:t>
+              <a:t>Hospital confirms on the portal — the 56-day cooldown starts</a:t>
             </a:r>
           </a:p>
           <a:p>
@@ -6558,7 +6578,7 @@
                 </a:solidFill>
                 <a:latin typeface="Helvetica Neue"/>
               </a:rPr>
-              <a:t>Backend: 196 tests green against real PostgreSQL via Testcontainers</a:t>
+              <a:t>Backend: 201 tests green against real PostgreSQL via Testcontainers</a:t>
             </a:r>
           </a:p>
           <a:p>
@@ -6583,7 +6603,7 @@
                 </a:solidFill>
                 <a:latin typeface="Helvetica Neue"/>
               </a:rPr>
-              <a:t>Mobile: 189 tests green — iOS and Android both build today</a:t>
+              <a:t>Mobile: 201 tests green — iOS and Android both build today</a:t>
             </a:r>
           </a:p>
           <a:p>
@@ -6608,7 +6628,7 @@
                 </a:solidFill>
                 <a:latin typeface="Helvetica Neue"/>
               </a:rPr>
-              <a:t>Since M7: public request board, portal staff accounts, mobile language switch</a:t>
+              <a:t>Since M7: two-way push, public board, portal staff accounts, language switch</a:t>
             </a:r>
           </a:p>
           <a:p>

--- a/docs/po/presentations/LifeLinkKH-v2.pptx
+++ b/docs/po/presentations/LifeLinkKH-v2.pptx
@@ -2489,7 +2489,17 @@
           <a:p/>
           <a:p>
             <a:r>
-              <a:t>Staff accounts (right) replaced a JWT pasted into a .env file by hand (DEC-010). Nobody</a:t>
+              <a:t>The right-hand shot is the moment the demo ends on: a donor who accepted, and the confirm</a:t>
+            </a:r>
+          </a:p>
+          <a:p>
+            <a:r>
+              <a:t>button whose click starts their 56-day cooldown. Staff accounts replaced a JWT pasted into a</a:t>
+            </a:r>
+          </a:p>
+          <a:p>
+            <a:r>
+              <a:t>.env file by hand (DEC-010). Nobody</a:t>
             </a:r>
           </a:p>
           <a:p>
@@ -10129,8 +10139,8 @@
         </p:blipFill>
         <p:spPr>
           <a:xfrm>
-            <a:off x="800124" y="2395728"/>
-            <a:ext cx="5781702" cy="2834640"/>
+            <a:off x="1423263" y="2395728"/>
+            <a:ext cx="4535424" cy="2834640"/>
           </a:xfrm>
           <a:prstGeom prst="rect">
             <a:avLst/>
@@ -10153,7 +10163,7 @@
         </p:blipFill>
         <p:spPr>
           <a:xfrm>
-            <a:off x="6856146" y="2395728"/>
+            <a:off x="6233007" y="2395728"/>
             <a:ext cx="4535424" cy="2834640"/>
           </a:xfrm>
           <a:prstGeom prst="rect">
@@ -10169,42 +10179,7 @@
         </p:nvSpPr>
         <p:spPr>
           <a:xfrm>
-            <a:off x="800124" y="5303520"/>
-            <a:ext cx="5781702" cy="457200"/>
-          </a:xfrm>
-          <a:prstGeom prst="rect">
-            <a:avLst/>
-          </a:prstGeom>
-          <a:noFill/>
-        </p:spPr>
-        <p:txBody>
-          <a:bodyPr wrap="square">
-            <a:spAutoFit/>
-          </a:bodyPr>
-          <a:lstStyle/>
-          <a:p>
-            <a:pPr algn="ctr"/>
-            <a:r>
-              <a:rPr sz="1300" b="0">
-                <a:solidFill>
-                  <a:srgbClr val="5A5A6E"/>
-                </a:solidFill>
-                <a:latin typeface="Helvetica Neue"/>
-              </a:rPr>
-              <a:t>Public board — open requests, no account needed</a:t>
-            </a:r>
-          </a:p>
-        </p:txBody>
-      </p:sp>
-      <p:sp>
-        <p:nvSpPr>
-          <p:cNvPr id="7" name="TextBox 6"/>
-          <p:cNvSpPr txBox="1"/>
-          <p:nvPr/>
-        </p:nvSpPr>
-        <p:spPr>
-          <a:xfrm>
-            <a:off x="6856146" y="5303520"/>
+            <a:off x="1423263" y="5303520"/>
             <a:ext cx="4535424" cy="457200"/>
           </a:xfrm>
           <a:prstGeom prst="rect">
@@ -10226,7 +10201,42 @@
                 </a:solidFill>
                 <a:latin typeface="Helvetica Neue"/>
               </a:rPr>
-              <a:t>The same board, signed in as hospital staff</a:t>
+              <a:t>Public board — open requests, no account needed</a:t>
+            </a:r>
+          </a:p>
+        </p:txBody>
+      </p:sp>
+      <p:sp>
+        <p:nvSpPr>
+          <p:cNvPr id="7" name="TextBox 6"/>
+          <p:cNvSpPr txBox="1"/>
+          <p:nvPr/>
+        </p:nvSpPr>
+        <p:spPr>
+          <a:xfrm>
+            <a:off x="6233007" y="5303520"/>
+            <a:ext cx="4535424" cy="457200"/>
+          </a:xfrm>
+          <a:prstGeom prst="rect">
+            <a:avLst/>
+          </a:prstGeom>
+          <a:noFill/>
+        </p:spPr>
+        <p:txBody>
+          <a:bodyPr wrap="square">
+            <a:spAutoFit/>
+          </a:bodyPr>
+          <a:lstStyle/>
+          <a:p>
+            <a:pPr algn="ctr"/>
+            <a:r>
+              <a:rPr sz="1300" b="0">
+                <a:solidFill>
+                  <a:srgbClr val="5A5A6E"/>
+                </a:solidFill>
+                <a:latin typeface="Helvetica Neue"/>
+              </a:rPr>
+              <a:t>Hospital staff — an accepted donor, one click to confirm</a:t>
             </a:r>
           </a:p>
         </p:txBody>
